--- a/presentation/Stack_Group04_Presentation.pptx
+++ b/presentation/Stack_Group04_Presentation.pptx
@@ -14,6 +14,7 @@
     <p:sldId id="259" r:id="rId7"/>
     <p:sldId id="260" r:id="rId8"/>
     <p:sldId id="261" r:id="rId9"/>
+    <p:sldId id="268" r:id="rId17"/>
     <p:sldId id="262" r:id="rId10"/>
     <p:sldId id="263" r:id="rId11"/>
     <p:sldId id="264" r:id="rId12"/>
@@ -10259,35 +10260,13 @@
             </a:lvl1pPr>
           </a:lstStyle>
           <a:p>
-            <a:pPr indent="0" algn="l" defTabSz="914400">
-              <a:lnSpc>
-                <a:spcPct val="100000"/>
-              </a:lnSpc>
-              <a:buNone/>
-              <a:tabLst>
-                <a:tab pos="0" algn="l"/>
-              </a:tabLst>
-            </a:pPr>
-            <a:fld id="{282C77EC-D13D-41C9-8568-8303B7E1A758}" type="slidenum">
-              <a:rPr lang="en-US" sz="1200" b="0" u="none" strike="noStrike">
-                <a:solidFill>
-                  <a:srgbClr val="667085"/>
-                </a:solidFill>
-                <a:effectLst/>
-                <a:uFillTx/>
-                <a:latin typeface="TH Sarabun New"/>
-                <a:ea typeface="TH Sarabun New"/>
-              </a:rPr>
-              <a:t>10</a:t>
-            </a:fld>
-            <a:endParaRPr lang="en-US" sz="1200" b="0" u="none" strike="noStrike">
-              <a:solidFill>
-                <a:srgbClr val="000000"/>
-              </a:solidFill>
-              <a:effectLst/>
-              <a:uFillTx/>
-              <a:latin typeface="Times New Roman"/>
-            </a:endParaRPr>
+            <a:pPr algn="ctr"/>
+            <a:r>
+              <a:rPr sz="1200" b="0">
+                <a:latin typeface="TH Sarabun New"/>
+              </a:rPr>
+              <a:t>11</a:t>
+            </a:r>
           </a:p>
         </p:txBody>
       </p:sp>
@@ -10426,35 +10405,13 @@
             </a:lvl1pPr>
           </a:lstStyle>
           <a:p>
-            <a:pPr indent="0" algn="l" defTabSz="914400">
-              <a:lnSpc>
-                <a:spcPct val="100000"/>
-              </a:lnSpc>
-              <a:buNone/>
-              <a:tabLst>
-                <a:tab pos="0" algn="l"/>
-              </a:tabLst>
-            </a:pPr>
-            <a:fld id="{BFC1DA9D-9281-4BD5-8DD8-182796864E2B}" type="slidenum">
-              <a:rPr lang="en-US" sz="1200" b="0" u="none" strike="noStrike">
-                <a:solidFill>
-                  <a:srgbClr val="667085"/>
-                </a:solidFill>
-                <a:effectLst/>
-                <a:uFillTx/>
-                <a:latin typeface="TH Sarabun New"/>
-                <a:ea typeface="TH Sarabun New"/>
-              </a:rPr>
-              <a:t>11</a:t>
-            </a:fld>
-            <a:endParaRPr lang="en-US" sz="1200" b="0" u="none" strike="noStrike">
-              <a:solidFill>
-                <a:srgbClr val="000000"/>
-              </a:solidFill>
-              <a:effectLst/>
-              <a:uFillTx/>
-              <a:latin typeface="Times New Roman"/>
-            </a:endParaRPr>
+            <a:pPr algn="ctr"/>
+            <a:r>
+              <a:rPr sz="1200" b="0">
+                <a:latin typeface="TH Sarabun New"/>
+              </a:rPr>
+              <a:t>12</a:t>
+            </a:r>
           </a:p>
         </p:txBody>
       </p:sp>
@@ -15652,6 +15609,2767 @@
 </p:sld>
 </file>
 
+<file path=ppt/slides/slide13.xml><?xml version="1.0" encoding="utf-8"?>
+<p:sld xmlns:a="http://schemas.openxmlformats.org/drawingml/2006/main" xmlns:p="http://schemas.openxmlformats.org/presentationml/2006/main" xmlns:r="http://schemas.openxmlformats.org/officeDocument/2006/relationships">
+  <p:cSld>
+    <p:spTree>
+      <p:nvGrpSpPr>
+        <p:cNvPr id="1" name=""/>
+        <p:cNvGrpSpPr/>
+        <p:nvPr/>
+      </p:nvGrpSpPr>
+      <p:grpSpPr/>
+      <p:sp>
+        <p:nvSpPr>
+          <p:cNvPr id="2" name="Title 1"/>
+          <p:cNvSpPr>
+            <a:spLocks noGrp="1"/>
+          </p:cNvSpPr>
+          <p:nvPr>
+            <p:ph type="title"/>
+          </p:nvPr>
+        </p:nvSpPr>
+        <p:spPr/>
+        <p:txBody>
+          <a:bodyPr/>
+          <a:lstStyle/>
+          <a:p/>
+        </p:txBody>
+      </p:sp>
+      <p:sp>
+        <p:nvSpPr>
+          <p:cNvPr id="3" name="Text Placeholder 2"/>
+          <p:cNvSpPr>
+            <a:spLocks noGrp="1"/>
+          </p:cNvSpPr>
+          <p:nvPr>
+            <p:ph type="body"/>
+          </p:nvPr>
+        </p:nvSpPr>
+        <p:spPr/>
+        <p:txBody>
+          <a:bodyPr/>
+          <a:lstStyle/>
+          <a:p/>
+        </p:txBody>
+      </p:sp>
+      <p:sp>
+        <p:nvSpPr>
+          <p:cNvPr id="4" name="TextBox 3"/>
+          <p:cNvSpPr txBox="1"/>
+          <p:nvPr/>
+        </p:nvSpPr>
+        <p:spPr>
+          <a:xfrm>
+            <a:off x="530352" y="329184"/>
+            <a:ext cx="10972800" cy="438912"/>
+          </a:xfrm>
+          <a:prstGeom prst="rect">
+            <a:avLst/>
+          </a:prstGeom>
+          <a:noFill/>
+          <a:ln>
+            <a:noFill/>
+          </a:ln>
+        </p:spPr>
+        <p:txBody>
+          <a:bodyPr wrap="none" lIns="73152" rIns="73152" tIns="73152" bIns="73152" anchor="ctr">
+            <a:spAutoFit/>
+          </a:bodyPr>
+          <a:lstStyle/>
+          <a:p>
+            <a:pPr algn="l"/>
+            <a:r>
+              <a:rPr sz="1800" b="0">
+                <a:solidFill>
+                  <a:srgbClr val="000000"/>
+                </a:solidFill>
+                <a:latin typeface="TH Sarabun New"/>
+              </a:rPr>
+              <a:t>6. ตัวอย่าง Step-by-step — Algorithm B</a:t>
+            </a:r>
+          </a:p>
+        </p:txBody>
+      </p:sp>
+      <p:sp>
+        <p:nvSpPr>
+          <p:cNvPr id="5" name="TextBox 4"/>
+          <p:cNvSpPr txBox="1"/>
+          <p:nvPr/>
+        </p:nvSpPr>
+        <p:spPr>
+          <a:xfrm>
+            <a:off x="548640" y="841248"/>
+            <a:ext cx="10972800" cy="310896"/>
+          </a:xfrm>
+          <a:prstGeom prst="rect">
+            <a:avLst/>
+          </a:prstGeom>
+          <a:noFill/>
+          <a:ln>
+            <a:noFill/>
+          </a:ln>
+        </p:spPr>
+        <p:txBody>
+          <a:bodyPr wrap="none" lIns="73152" rIns="73152" tIns="73152" bIns="73152" anchor="ctr">
+            <a:spAutoFit/>
+          </a:bodyPr>
+          <a:lstStyle/>
+          <a:p>
+            <a:pPr algn="l"/>
+            <a:r>
+              <a:rPr sz="1300" b="1">
+                <a:solidFill>
+                  <a:srgbClr val="000000"/>
+                </a:solidFill>
+                <a:latin typeface="TH Sarabun New"/>
+              </a:rPr>
+              <a:t>Algorithm B • นิพจน์ (3 + 4) * 2 — แสดง Operand Stack และ Operator Stack หลังอ่านแต่ละ Token</a:t>
+            </a:r>
+          </a:p>
+        </p:txBody>
+      </p:sp>
+      <p:sp>
+        <p:nvSpPr>
+          <p:cNvPr id="6" name="Rectangle 5"/>
+          <p:cNvSpPr/>
+          <p:nvPr/>
+        </p:nvSpPr>
+        <p:spPr>
+          <a:xfrm>
+            <a:off x="548640" y="1243584"/>
+            <a:ext cx="594360" cy="438912"/>
+          </a:xfrm>
+          <a:prstGeom prst="rect">
+            <a:avLst/>
+          </a:prstGeom>
+          <a:solidFill>
+            <a:srgbClr val="EAF0F8"/>
+          </a:solidFill>
+          <a:ln w="10160">
+            <a:solidFill>
+              <a:srgbClr val="C9D5E5"/>
+            </a:solidFill>
+          </a:ln>
+        </p:spPr>
+        <p:style>
+          <a:lnRef idx="1">
+            <a:schemeClr val="accent1"/>
+          </a:lnRef>
+          <a:fillRef idx="3">
+            <a:schemeClr val="accent1"/>
+          </a:fillRef>
+          <a:effectRef idx="2">
+            <a:schemeClr val="accent1"/>
+          </a:effectRef>
+          <a:fontRef idx="minor">
+            <a:schemeClr val="lt1"/>
+          </a:fontRef>
+        </p:style>
+        <p:txBody>
+          <a:bodyPr rtlCol="0" anchor="ctr" lIns="73152" rIns="73152" tIns="73152" bIns="73152"/>
+          <a:lstStyle/>
+          <a:p>
+            <a:pPr algn="ctr"/>
+            <a:r>
+              <a:rPr sz="1270" b="1">
+                <a:solidFill>
+                  <a:srgbClr val="000000"/>
+                </a:solidFill>
+                <a:latin typeface="TH Sarabun New"/>
+              </a:rPr>
+              <a:t>#</a:t>
+            </a:r>
+          </a:p>
+        </p:txBody>
+      </p:sp>
+      <p:sp>
+        <p:nvSpPr>
+          <p:cNvPr id="7" name="Rectangle 6"/>
+          <p:cNvSpPr/>
+          <p:nvPr/>
+        </p:nvSpPr>
+        <p:spPr>
+          <a:xfrm>
+            <a:off x="1143000" y="1243584"/>
+            <a:ext cx="1325880" cy="438912"/>
+          </a:xfrm>
+          <a:prstGeom prst="rect">
+            <a:avLst/>
+          </a:prstGeom>
+          <a:solidFill>
+            <a:srgbClr val="EAF0F8"/>
+          </a:solidFill>
+          <a:ln w="10160">
+            <a:solidFill>
+              <a:srgbClr val="C9D5E5"/>
+            </a:solidFill>
+          </a:ln>
+        </p:spPr>
+        <p:style>
+          <a:lnRef idx="1">
+            <a:schemeClr val="accent1"/>
+          </a:lnRef>
+          <a:fillRef idx="3">
+            <a:schemeClr val="accent1"/>
+          </a:fillRef>
+          <a:effectRef idx="2">
+            <a:schemeClr val="accent1"/>
+          </a:effectRef>
+          <a:fontRef idx="minor">
+            <a:schemeClr val="lt1"/>
+          </a:fontRef>
+        </p:style>
+        <p:txBody>
+          <a:bodyPr rtlCol="0" anchor="ctr" lIns="73152" rIns="73152" tIns="73152" bIns="73152"/>
+          <a:lstStyle/>
+          <a:p>
+            <a:pPr algn="ctr"/>
+            <a:r>
+              <a:rPr sz="1270" b="1">
+                <a:solidFill>
+                  <a:srgbClr val="000000"/>
+                </a:solidFill>
+                <a:latin typeface="TH Sarabun New"/>
+              </a:rPr>
+              <a:t>Token</a:t>
+            </a:r>
+          </a:p>
+        </p:txBody>
+      </p:sp>
+      <p:sp>
+        <p:nvSpPr>
+          <p:cNvPr id="8" name="Rectangle 7"/>
+          <p:cNvSpPr/>
+          <p:nvPr/>
+        </p:nvSpPr>
+        <p:spPr>
+          <a:xfrm>
+            <a:off x="2468880" y="1243584"/>
+            <a:ext cx="3657600" cy="438912"/>
+          </a:xfrm>
+          <a:prstGeom prst="rect">
+            <a:avLst/>
+          </a:prstGeom>
+          <a:solidFill>
+            <a:srgbClr val="EAF0F8"/>
+          </a:solidFill>
+          <a:ln w="10160">
+            <a:solidFill>
+              <a:srgbClr val="C9D5E5"/>
+            </a:solidFill>
+          </a:ln>
+        </p:spPr>
+        <p:style>
+          <a:lnRef idx="1">
+            <a:schemeClr val="accent1"/>
+          </a:lnRef>
+          <a:fillRef idx="3">
+            <a:schemeClr val="accent1"/>
+          </a:fillRef>
+          <a:effectRef idx="2">
+            <a:schemeClr val="accent1"/>
+          </a:effectRef>
+          <a:fontRef idx="minor">
+            <a:schemeClr val="lt1"/>
+          </a:fontRef>
+        </p:style>
+        <p:txBody>
+          <a:bodyPr rtlCol="0" anchor="ctr" lIns="73152" rIns="73152" tIns="73152" bIns="73152"/>
+          <a:lstStyle/>
+          <a:p>
+            <a:pPr algn="ctr"/>
+            <a:r>
+              <a:rPr sz="1270" b="1">
+                <a:solidFill>
+                  <a:srgbClr val="000000"/>
+                </a:solidFill>
+                <a:latin typeface="TH Sarabun New"/>
+              </a:rPr>
+              <a:t>Action</a:t>
+            </a:r>
+          </a:p>
+        </p:txBody>
+      </p:sp>
+      <p:sp>
+        <p:nvSpPr>
+          <p:cNvPr id="9" name="Rectangle 8"/>
+          <p:cNvSpPr/>
+          <p:nvPr/>
+        </p:nvSpPr>
+        <p:spPr>
+          <a:xfrm>
+            <a:off x="6126480" y="1243584"/>
+            <a:ext cx="2788920" cy="438912"/>
+          </a:xfrm>
+          <a:prstGeom prst="rect">
+            <a:avLst/>
+          </a:prstGeom>
+          <a:solidFill>
+            <a:srgbClr val="EAF0F8"/>
+          </a:solidFill>
+          <a:ln w="10160">
+            <a:solidFill>
+              <a:srgbClr val="C9D5E5"/>
+            </a:solidFill>
+          </a:ln>
+        </p:spPr>
+        <p:style>
+          <a:lnRef idx="1">
+            <a:schemeClr val="accent1"/>
+          </a:lnRef>
+          <a:fillRef idx="3">
+            <a:schemeClr val="accent1"/>
+          </a:fillRef>
+          <a:effectRef idx="2">
+            <a:schemeClr val="accent1"/>
+          </a:effectRef>
+          <a:fontRef idx="minor">
+            <a:schemeClr val="lt1"/>
+          </a:fontRef>
+        </p:style>
+        <p:txBody>
+          <a:bodyPr rtlCol="0" anchor="ctr" lIns="73152" rIns="73152" tIns="73152" bIns="73152"/>
+          <a:lstStyle/>
+          <a:p>
+            <a:pPr algn="ctr"/>
+            <a:r>
+              <a:rPr sz="1270" b="1">
+                <a:solidFill>
+                  <a:srgbClr val="000000"/>
+                </a:solidFill>
+                <a:latin typeface="TH Sarabun New"/>
+              </a:rPr>
+              <a:t>Operator Stack</a:t>
+            </a:r>
+          </a:p>
+        </p:txBody>
+      </p:sp>
+      <p:sp>
+        <p:nvSpPr>
+          <p:cNvPr id="10" name="Rectangle 9"/>
+          <p:cNvSpPr/>
+          <p:nvPr/>
+        </p:nvSpPr>
+        <p:spPr>
+          <a:xfrm>
+            <a:off x="8915400" y="1243584"/>
+            <a:ext cx="3566160" cy="438912"/>
+          </a:xfrm>
+          <a:prstGeom prst="rect">
+            <a:avLst/>
+          </a:prstGeom>
+          <a:solidFill>
+            <a:srgbClr val="EAF0F8"/>
+          </a:solidFill>
+          <a:ln w="10160">
+            <a:solidFill>
+              <a:srgbClr val="C9D5E5"/>
+            </a:solidFill>
+          </a:ln>
+        </p:spPr>
+        <p:style>
+          <a:lnRef idx="1">
+            <a:schemeClr val="accent1"/>
+          </a:lnRef>
+          <a:fillRef idx="3">
+            <a:schemeClr val="accent1"/>
+          </a:fillRef>
+          <a:effectRef idx="2">
+            <a:schemeClr val="accent1"/>
+          </a:effectRef>
+          <a:fontRef idx="minor">
+            <a:schemeClr val="lt1"/>
+          </a:fontRef>
+        </p:style>
+        <p:txBody>
+          <a:bodyPr rtlCol="0" anchor="ctr" lIns="73152" rIns="73152" tIns="73152" bIns="73152"/>
+          <a:lstStyle/>
+          <a:p>
+            <a:pPr algn="ctr"/>
+            <a:r>
+              <a:rPr sz="1270" b="1">
+                <a:solidFill>
+                  <a:srgbClr val="000000"/>
+                </a:solidFill>
+                <a:latin typeface="TH Sarabun New"/>
+              </a:rPr>
+              <a:t>Operand Stack</a:t>
+            </a:r>
+          </a:p>
+        </p:txBody>
+      </p:sp>
+      <p:sp>
+        <p:nvSpPr>
+          <p:cNvPr id="11" name="Rectangle 10"/>
+          <p:cNvSpPr/>
+          <p:nvPr/>
+        </p:nvSpPr>
+        <p:spPr>
+          <a:xfrm>
+            <a:off x="548640" y="1682496"/>
+            <a:ext cx="594360" cy="484632"/>
+          </a:xfrm>
+          <a:prstGeom prst="rect">
+            <a:avLst/>
+          </a:prstGeom>
+          <a:solidFill>
+            <a:srgbClr val="FFFFFF"/>
+          </a:solidFill>
+          <a:ln w="10160">
+            <a:solidFill>
+              <a:srgbClr val="C9D5E5"/>
+            </a:solidFill>
+          </a:ln>
+        </p:spPr>
+        <p:style>
+          <a:lnRef idx="1">
+            <a:schemeClr val="accent1"/>
+          </a:lnRef>
+          <a:fillRef idx="3">
+            <a:schemeClr val="accent1"/>
+          </a:fillRef>
+          <a:effectRef idx="2">
+            <a:schemeClr val="accent1"/>
+          </a:effectRef>
+          <a:fontRef idx="minor">
+            <a:schemeClr val="lt1"/>
+          </a:fontRef>
+        </p:style>
+        <p:txBody>
+          <a:bodyPr rtlCol="0" anchor="ctr" lIns="73152" rIns="73152" tIns="73152" bIns="73152"/>
+          <a:lstStyle/>
+          <a:p>
+            <a:pPr algn="ctr"/>
+            <a:r>
+              <a:rPr sz="1230" b="0">
+                <a:solidFill>
+                  <a:srgbClr val="000000"/>
+                </a:solidFill>
+                <a:latin typeface="TH Sarabun New"/>
+              </a:rPr>
+              <a:t>1</a:t>
+            </a:r>
+          </a:p>
+        </p:txBody>
+      </p:sp>
+      <p:sp>
+        <p:nvSpPr>
+          <p:cNvPr id="12" name="Rectangle 11"/>
+          <p:cNvSpPr/>
+          <p:nvPr/>
+        </p:nvSpPr>
+        <p:spPr>
+          <a:xfrm>
+            <a:off x="1143000" y="1682496"/>
+            <a:ext cx="1325880" cy="484632"/>
+          </a:xfrm>
+          <a:prstGeom prst="rect">
+            <a:avLst/>
+          </a:prstGeom>
+          <a:solidFill>
+            <a:srgbClr val="FFFFFF"/>
+          </a:solidFill>
+          <a:ln w="10160">
+            <a:solidFill>
+              <a:srgbClr val="C9D5E5"/>
+            </a:solidFill>
+          </a:ln>
+        </p:spPr>
+        <p:style>
+          <a:lnRef idx="1">
+            <a:schemeClr val="accent1"/>
+          </a:lnRef>
+          <a:fillRef idx="3">
+            <a:schemeClr val="accent1"/>
+          </a:fillRef>
+          <a:effectRef idx="2">
+            <a:schemeClr val="accent1"/>
+          </a:effectRef>
+          <a:fontRef idx="minor">
+            <a:schemeClr val="lt1"/>
+          </a:fontRef>
+        </p:style>
+        <p:txBody>
+          <a:bodyPr rtlCol="0" anchor="ctr" lIns="73152" rIns="73152" tIns="73152" bIns="73152"/>
+          <a:lstStyle/>
+          <a:p>
+            <a:pPr algn="ctr"/>
+            <a:r>
+              <a:rPr sz="1230" b="0">
+                <a:solidFill>
+                  <a:srgbClr val="000000"/>
+                </a:solidFill>
+                <a:latin typeface="TH Sarabun New"/>
+              </a:rPr>
+              <a:t>(</a:t>
+            </a:r>
+          </a:p>
+        </p:txBody>
+      </p:sp>
+      <p:sp>
+        <p:nvSpPr>
+          <p:cNvPr id="13" name="Rectangle 12"/>
+          <p:cNvSpPr/>
+          <p:nvPr/>
+        </p:nvSpPr>
+        <p:spPr>
+          <a:xfrm>
+            <a:off x="2468880" y="1682496"/>
+            <a:ext cx="3657600" cy="484632"/>
+          </a:xfrm>
+          <a:prstGeom prst="rect">
+            <a:avLst/>
+          </a:prstGeom>
+          <a:solidFill>
+            <a:srgbClr val="FFFFFF"/>
+          </a:solidFill>
+          <a:ln w="10160">
+            <a:solidFill>
+              <a:srgbClr val="C9D5E5"/>
+            </a:solidFill>
+          </a:ln>
+        </p:spPr>
+        <p:style>
+          <a:lnRef idx="1">
+            <a:schemeClr val="accent1"/>
+          </a:lnRef>
+          <a:fillRef idx="3">
+            <a:schemeClr val="accent1"/>
+          </a:fillRef>
+          <a:effectRef idx="2">
+            <a:schemeClr val="accent1"/>
+          </a:effectRef>
+          <a:fontRef idx="minor">
+            <a:schemeClr val="lt1"/>
+          </a:fontRef>
+        </p:style>
+        <p:txBody>
+          <a:bodyPr rtlCol="0" anchor="ctr" lIns="73152" rIns="73152" tIns="73152" bIns="73152"/>
+          <a:lstStyle/>
+          <a:p>
+            <a:pPr algn="ctr"/>
+            <a:r>
+              <a:rPr sz="1230" b="0">
+                <a:solidFill>
+                  <a:srgbClr val="000000"/>
+                </a:solidFill>
+                <a:latin typeface="TH Sarabun New"/>
+              </a:rPr>
+              <a:t>push (</a:t>
+            </a:r>
+          </a:p>
+        </p:txBody>
+      </p:sp>
+      <p:sp>
+        <p:nvSpPr>
+          <p:cNvPr id="14" name="Rectangle 13"/>
+          <p:cNvSpPr/>
+          <p:nvPr/>
+        </p:nvSpPr>
+        <p:spPr>
+          <a:xfrm>
+            <a:off x="6126480" y="1682496"/>
+            <a:ext cx="2788920" cy="484632"/>
+          </a:xfrm>
+          <a:prstGeom prst="rect">
+            <a:avLst/>
+          </a:prstGeom>
+          <a:solidFill>
+            <a:srgbClr val="FFFFFF"/>
+          </a:solidFill>
+          <a:ln w="10160">
+            <a:solidFill>
+              <a:srgbClr val="C9D5E5"/>
+            </a:solidFill>
+          </a:ln>
+        </p:spPr>
+        <p:style>
+          <a:lnRef idx="1">
+            <a:schemeClr val="accent1"/>
+          </a:lnRef>
+          <a:fillRef idx="3">
+            <a:schemeClr val="accent1"/>
+          </a:fillRef>
+          <a:effectRef idx="2">
+            <a:schemeClr val="accent1"/>
+          </a:effectRef>
+          <a:fontRef idx="minor">
+            <a:schemeClr val="lt1"/>
+          </a:fontRef>
+        </p:style>
+        <p:txBody>
+          <a:bodyPr rtlCol="0" anchor="ctr" lIns="73152" rIns="73152" tIns="73152" bIns="73152"/>
+          <a:lstStyle/>
+          <a:p>
+            <a:pPr algn="ctr"/>
+            <a:r>
+              <a:rPr sz="1230" b="0">
+                <a:solidFill>
+                  <a:srgbClr val="000000"/>
+                </a:solidFill>
+                <a:latin typeface="TH Sarabun New"/>
+              </a:rPr>
+              <a:t>(</a:t>
+            </a:r>
+          </a:p>
+        </p:txBody>
+      </p:sp>
+      <p:sp>
+        <p:nvSpPr>
+          <p:cNvPr id="15" name="Rectangle 14"/>
+          <p:cNvSpPr/>
+          <p:nvPr/>
+        </p:nvSpPr>
+        <p:spPr>
+          <a:xfrm>
+            <a:off x="8915400" y="1682496"/>
+            <a:ext cx="3566160" cy="484632"/>
+          </a:xfrm>
+          <a:prstGeom prst="rect">
+            <a:avLst/>
+          </a:prstGeom>
+          <a:solidFill>
+            <a:srgbClr val="FFFFFF"/>
+          </a:solidFill>
+          <a:ln w="10160">
+            <a:solidFill>
+              <a:srgbClr val="C9D5E5"/>
+            </a:solidFill>
+          </a:ln>
+        </p:spPr>
+        <p:style>
+          <a:lnRef idx="1">
+            <a:schemeClr val="accent1"/>
+          </a:lnRef>
+          <a:fillRef idx="3">
+            <a:schemeClr val="accent1"/>
+          </a:fillRef>
+          <a:effectRef idx="2">
+            <a:schemeClr val="accent1"/>
+          </a:effectRef>
+          <a:fontRef idx="minor">
+            <a:schemeClr val="lt1"/>
+          </a:fontRef>
+        </p:style>
+        <p:txBody>
+          <a:bodyPr rtlCol="0" anchor="ctr" lIns="73152" rIns="73152" tIns="73152" bIns="73152"/>
+          <a:lstStyle/>
+          <a:p>
+            <a:pPr algn="ctr"/>
+            <a:r>
+              <a:rPr sz="1230" b="0">
+                <a:solidFill>
+                  <a:srgbClr val="000000"/>
+                </a:solidFill>
+                <a:latin typeface="TH Sarabun New"/>
+              </a:rPr>
+              <a:t>∅</a:t>
+            </a:r>
+          </a:p>
+        </p:txBody>
+      </p:sp>
+      <p:sp>
+        <p:nvSpPr>
+          <p:cNvPr id="16" name="Rectangle 15"/>
+          <p:cNvSpPr/>
+          <p:nvPr/>
+        </p:nvSpPr>
+        <p:spPr>
+          <a:xfrm>
+            <a:off x="548640" y="2167128"/>
+            <a:ext cx="594360" cy="484632"/>
+          </a:xfrm>
+          <a:prstGeom prst="rect">
+            <a:avLst/>
+          </a:prstGeom>
+          <a:solidFill>
+            <a:srgbClr val="FFFFFF"/>
+          </a:solidFill>
+          <a:ln w="10160">
+            <a:solidFill>
+              <a:srgbClr val="C9D5E5"/>
+            </a:solidFill>
+          </a:ln>
+        </p:spPr>
+        <p:style>
+          <a:lnRef idx="1">
+            <a:schemeClr val="accent1"/>
+          </a:lnRef>
+          <a:fillRef idx="3">
+            <a:schemeClr val="accent1"/>
+          </a:fillRef>
+          <a:effectRef idx="2">
+            <a:schemeClr val="accent1"/>
+          </a:effectRef>
+          <a:fontRef idx="minor">
+            <a:schemeClr val="lt1"/>
+          </a:fontRef>
+        </p:style>
+        <p:txBody>
+          <a:bodyPr rtlCol="0" anchor="ctr" lIns="73152" rIns="73152" tIns="73152" bIns="73152"/>
+          <a:lstStyle/>
+          <a:p>
+            <a:pPr algn="ctr"/>
+            <a:r>
+              <a:rPr sz="1230" b="0">
+                <a:solidFill>
+                  <a:srgbClr val="000000"/>
+                </a:solidFill>
+                <a:latin typeface="TH Sarabun New"/>
+              </a:rPr>
+              <a:t>2</a:t>
+            </a:r>
+          </a:p>
+        </p:txBody>
+      </p:sp>
+      <p:sp>
+        <p:nvSpPr>
+          <p:cNvPr id="17" name="Rectangle 16"/>
+          <p:cNvSpPr/>
+          <p:nvPr/>
+        </p:nvSpPr>
+        <p:spPr>
+          <a:xfrm>
+            <a:off x="1143000" y="2167128"/>
+            <a:ext cx="1325880" cy="484632"/>
+          </a:xfrm>
+          <a:prstGeom prst="rect">
+            <a:avLst/>
+          </a:prstGeom>
+          <a:solidFill>
+            <a:srgbClr val="FFFFFF"/>
+          </a:solidFill>
+          <a:ln w="10160">
+            <a:solidFill>
+              <a:srgbClr val="C9D5E5"/>
+            </a:solidFill>
+          </a:ln>
+        </p:spPr>
+        <p:style>
+          <a:lnRef idx="1">
+            <a:schemeClr val="accent1"/>
+          </a:lnRef>
+          <a:fillRef idx="3">
+            <a:schemeClr val="accent1"/>
+          </a:fillRef>
+          <a:effectRef idx="2">
+            <a:schemeClr val="accent1"/>
+          </a:effectRef>
+          <a:fontRef idx="minor">
+            <a:schemeClr val="lt1"/>
+          </a:fontRef>
+        </p:style>
+        <p:txBody>
+          <a:bodyPr rtlCol="0" anchor="ctr" lIns="73152" rIns="73152" tIns="73152" bIns="73152"/>
+          <a:lstStyle/>
+          <a:p>
+            <a:pPr algn="ctr"/>
+            <a:r>
+              <a:rPr sz="1230" b="0">
+                <a:solidFill>
+                  <a:srgbClr val="000000"/>
+                </a:solidFill>
+                <a:latin typeface="TH Sarabun New"/>
+              </a:rPr>
+              <a:t>3</a:t>
+            </a:r>
+          </a:p>
+        </p:txBody>
+      </p:sp>
+      <p:sp>
+        <p:nvSpPr>
+          <p:cNvPr id="18" name="Rectangle 17"/>
+          <p:cNvSpPr/>
+          <p:nvPr/>
+        </p:nvSpPr>
+        <p:spPr>
+          <a:xfrm>
+            <a:off x="2468880" y="2167128"/>
+            <a:ext cx="3657600" cy="484632"/>
+          </a:xfrm>
+          <a:prstGeom prst="rect">
+            <a:avLst/>
+          </a:prstGeom>
+          <a:solidFill>
+            <a:srgbClr val="FFFFFF"/>
+          </a:solidFill>
+          <a:ln w="10160">
+            <a:solidFill>
+              <a:srgbClr val="C9D5E5"/>
+            </a:solidFill>
+          </a:ln>
+        </p:spPr>
+        <p:style>
+          <a:lnRef idx="1">
+            <a:schemeClr val="accent1"/>
+          </a:lnRef>
+          <a:fillRef idx="3">
+            <a:schemeClr val="accent1"/>
+          </a:fillRef>
+          <a:effectRef idx="2">
+            <a:schemeClr val="accent1"/>
+          </a:effectRef>
+          <a:fontRef idx="minor">
+            <a:schemeClr val="lt1"/>
+          </a:fontRef>
+        </p:style>
+        <p:txBody>
+          <a:bodyPr rtlCol="0" anchor="ctr" lIns="73152" rIns="73152" tIns="73152" bIns="73152"/>
+          <a:lstStyle/>
+          <a:p>
+            <a:pPr algn="ctr"/>
+            <a:r>
+              <a:rPr sz="1230" b="0">
+                <a:solidFill>
+                  <a:srgbClr val="000000"/>
+                </a:solidFill>
+                <a:latin typeface="TH Sarabun New"/>
+              </a:rPr>
+              <a:t>push 3</a:t>
+            </a:r>
+          </a:p>
+        </p:txBody>
+      </p:sp>
+      <p:sp>
+        <p:nvSpPr>
+          <p:cNvPr id="19" name="Rectangle 18"/>
+          <p:cNvSpPr/>
+          <p:nvPr/>
+        </p:nvSpPr>
+        <p:spPr>
+          <a:xfrm>
+            <a:off x="6126480" y="2167128"/>
+            <a:ext cx="2788920" cy="484632"/>
+          </a:xfrm>
+          <a:prstGeom prst="rect">
+            <a:avLst/>
+          </a:prstGeom>
+          <a:solidFill>
+            <a:srgbClr val="FFFFFF"/>
+          </a:solidFill>
+          <a:ln w="10160">
+            <a:solidFill>
+              <a:srgbClr val="C9D5E5"/>
+            </a:solidFill>
+          </a:ln>
+        </p:spPr>
+        <p:style>
+          <a:lnRef idx="1">
+            <a:schemeClr val="accent1"/>
+          </a:lnRef>
+          <a:fillRef idx="3">
+            <a:schemeClr val="accent1"/>
+          </a:fillRef>
+          <a:effectRef idx="2">
+            <a:schemeClr val="accent1"/>
+          </a:effectRef>
+          <a:fontRef idx="minor">
+            <a:schemeClr val="lt1"/>
+          </a:fontRef>
+        </p:style>
+        <p:txBody>
+          <a:bodyPr rtlCol="0" anchor="ctr" lIns="73152" rIns="73152" tIns="73152" bIns="73152"/>
+          <a:lstStyle/>
+          <a:p>
+            <a:pPr algn="ctr"/>
+            <a:r>
+              <a:rPr sz="1230" b="0">
+                <a:solidFill>
+                  <a:srgbClr val="000000"/>
+                </a:solidFill>
+                <a:latin typeface="TH Sarabun New"/>
+              </a:rPr>
+              <a:t>(</a:t>
+            </a:r>
+          </a:p>
+        </p:txBody>
+      </p:sp>
+      <p:sp>
+        <p:nvSpPr>
+          <p:cNvPr id="20" name="Rectangle 19"/>
+          <p:cNvSpPr/>
+          <p:nvPr/>
+        </p:nvSpPr>
+        <p:spPr>
+          <a:xfrm>
+            <a:off x="8915400" y="2167128"/>
+            <a:ext cx="3566160" cy="484632"/>
+          </a:xfrm>
+          <a:prstGeom prst="rect">
+            <a:avLst/>
+          </a:prstGeom>
+          <a:solidFill>
+            <a:srgbClr val="FFFFFF"/>
+          </a:solidFill>
+          <a:ln w="10160">
+            <a:solidFill>
+              <a:srgbClr val="C9D5E5"/>
+            </a:solidFill>
+          </a:ln>
+        </p:spPr>
+        <p:style>
+          <a:lnRef idx="1">
+            <a:schemeClr val="accent1"/>
+          </a:lnRef>
+          <a:fillRef idx="3">
+            <a:schemeClr val="accent1"/>
+          </a:fillRef>
+          <a:effectRef idx="2">
+            <a:schemeClr val="accent1"/>
+          </a:effectRef>
+          <a:fontRef idx="minor">
+            <a:schemeClr val="lt1"/>
+          </a:fontRef>
+        </p:style>
+        <p:txBody>
+          <a:bodyPr rtlCol="0" anchor="ctr" lIns="73152" rIns="73152" tIns="73152" bIns="73152"/>
+          <a:lstStyle/>
+          <a:p>
+            <a:pPr algn="ctr"/>
+            <a:r>
+              <a:rPr sz="1230" b="0">
+                <a:solidFill>
+                  <a:srgbClr val="000000"/>
+                </a:solidFill>
+                <a:latin typeface="TH Sarabun New"/>
+              </a:rPr>
+              <a:t>3</a:t>
+            </a:r>
+          </a:p>
+        </p:txBody>
+      </p:sp>
+      <p:sp>
+        <p:nvSpPr>
+          <p:cNvPr id="21" name="Rectangle 20"/>
+          <p:cNvSpPr/>
+          <p:nvPr/>
+        </p:nvSpPr>
+        <p:spPr>
+          <a:xfrm>
+            <a:off x="548640" y="2651760"/>
+            <a:ext cx="594360" cy="484632"/>
+          </a:xfrm>
+          <a:prstGeom prst="rect">
+            <a:avLst/>
+          </a:prstGeom>
+          <a:solidFill>
+            <a:srgbClr val="FFFFFF"/>
+          </a:solidFill>
+          <a:ln w="10160">
+            <a:solidFill>
+              <a:srgbClr val="C9D5E5"/>
+            </a:solidFill>
+          </a:ln>
+        </p:spPr>
+        <p:style>
+          <a:lnRef idx="1">
+            <a:schemeClr val="accent1"/>
+          </a:lnRef>
+          <a:fillRef idx="3">
+            <a:schemeClr val="accent1"/>
+          </a:fillRef>
+          <a:effectRef idx="2">
+            <a:schemeClr val="accent1"/>
+          </a:effectRef>
+          <a:fontRef idx="minor">
+            <a:schemeClr val="lt1"/>
+          </a:fontRef>
+        </p:style>
+        <p:txBody>
+          <a:bodyPr rtlCol="0" anchor="ctr" lIns="73152" rIns="73152" tIns="73152" bIns="73152"/>
+          <a:lstStyle/>
+          <a:p>
+            <a:pPr algn="ctr"/>
+            <a:r>
+              <a:rPr sz="1230" b="0">
+                <a:solidFill>
+                  <a:srgbClr val="000000"/>
+                </a:solidFill>
+                <a:latin typeface="TH Sarabun New"/>
+              </a:rPr>
+              <a:t>3</a:t>
+            </a:r>
+          </a:p>
+        </p:txBody>
+      </p:sp>
+      <p:sp>
+        <p:nvSpPr>
+          <p:cNvPr id="22" name="Rectangle 21"/>
+          <p:cNvSpPr/>
+          <p:nvPr/>
+        </p:nvSpPr>
+        <p:spPr>
+          <a:xfrm>
+            <a:off x="1143000" y="2651760"/>
+            <a:ext cx="1325880" cy="484632"/>
+          </a:xfrm>
+          <a:prstGeom prst="rect">
+            <a:avLst/>
+          </a:prstGeom>
+          <a:solidFill>
+            <a:srgbClr val="FFFFFF"/>
+          </a:solidFill>
+          <a:ln w="10160">
+            <a:solidFill>
+              <a:srgbClr val="C9D5E5"/>
+            </a:solidFill>
+          </a:ln>
+        </p:spPr>
+        <p:style>
+          <a:lnRef idx="1">
+            <a:schemeClr val="accent1"/>
+          </a:lnRef>
+          <a:fillRef idx="3">
+            <a:schemeClr val="accent1"/>
+          </a:fillRef>
+          <a:effectRef idx="2">
+            <a:schemeClr val="accent1"/>
+          </a:effectRef>
+          <a:fontRef idx="minor">
+            <a:schemeClr val="lt1"/>
+          </a:fontRef>
+        </p:style>
+        <p:txBody>
+          <a:bodyPr rtlCol="0" anchor="ctr" lIns="73152" rIns="73152" tIns="73152" bIns="73152"/>
+          <a:lstStyle/>
+          <a:p>
+            <a:pPr algn="ctr"/>
+            <a:r>
+              <a:rPr sz="1230" b="0">
+                <a:solidFill>
+                  <a:srgbClr val="000000"/>
+                </a:solidFill>
+                <a:latin typeface="TH Sarabun New"/>
+              </a:rPr>
+              <a:t>+</a:t>
+            </a:r>
+          </a:p>
+        </p:txBody>
+      </p:sp>
+      <p:sp>
+        <p:nvSpPr>
+          <p:cNvPr id="23" name="Rectangle 22"/>
+          <p:cNvSpPr/>
+          <p:nvPr/>
+        </p:nvSpPr>
+        <p:spPr>
+          <a:xfrm>
+            <a:off x="2468880" y="2651760"/>
+            <a:ext cx="3657600" cy="484632"/>
+          </a:xfrm>
+          <a:prstGeom prst="rect">
+            <a:avLst/>
+          </a:prstGeom>
+          <a:solidFill>
+            <a:srgbClr val="FFFFFF"/>
+          </a:solidFill>
+          <a:ln w="10160">
+            <a:solidFill>
+              <a:srgbClr val="C9D5E5"/>
+            </a:solidFill>
+          </a:ln>
+        </p:spPr>
+        <p:style>
+          <a:lnRef idx="1">
+            <a:schemeClr val="accent1"/>
+          </a:lnRef>
+          <a:fillRef idx="3">
+            <a:schemeClr val="accent1"/>
+          </a:fillRef>
+          <a:effectRef idx="2">
+            <a:schemeClr val="accent1"/>
+          </a:effectRef>
+          <a:fontRef idx="minor">
+            <a:schemeClr val="lt1"/>
+          </a:fontRef>
+        </p:style>
+        <p:txBody>
+          <a:bodyPr rtlCol="0" anchor="ctr" lIns="73152" rIns="73152" tIns="73152" bIns="73152"/>
+          <a:lstStyle/>
+          <a:p>
+            <a:pPr algn="ctr"/>
+            <a:r>
+              <a:rPr sz="1230" b="0">
+                <a:solidFill>
+                  <a:srgbClr val="000000"/>
+                </a:solidFill>
+                <a:latin typeface="TH Sarabun New"/>
+              </a:rPr>
+              <a:t>push +</a:t>
+            </a:r>
+          </a:p>
+        </p:txBody>
+      </p:sp>
+      <p:sp>
+        <p:nvSpPr>
+          <p:cNvPr id="24" name="Rectangle 23"/>
+          <p:cNvSpPr/>
+          <p:nvPr/>
+        </p:nvSpPr>
+        <p:spPr>
+          <a:xfrm>
+            <a:off x="6126480" y="2651760"/>
+            <a:ext cx="2788920" cy="484632"/>
+          </a:xfrm>
+          <a:prstGeom prst="rect">
+            <a:avLst/>
+          </a:prstGeom>
+          <a:solidFill>
+            <a:srgbClr val="FFFFFF"/>
+          </a:solidFill>
+          <a:ln w="10160">
+            <a:solidFill>
+              <a:srgbClr val="C9D5E5"/>
+            </a:solidFill>
+          </a:ln>
+        </p:spPr>
+        <p:style>
+          <a:lnRef idx="1">
+            <a:schemeClr val="accent1"/>
+          </a:lnRef>
+          <a:fillRef idx="3">
+            <a:schemeClr val="accent1"/>
+          </a:fillRef>
+          <a:effectRef idx="2">
+            <a:schemeClr val="accent1"/>
+          </a:effectRef>
+          <a:fontRef idx="minor">
+            <a:schemeClr val="lt1"/>
+          </a:fontRef>
+        </p:style>
+        <p:txBody>
+          <a:bodyPr rtlCol="0" anchor="ctr" lIns="73152" rIns="73152" tIns="73152" bIns="73152"/>
+          <a:lstStyle/>
+          <a:p>
+            <a:pPr algn="ctr"/>
+            <a:r>
+              <a:rPr sz="1230" b="0">
+                <a:solidFill>
+                  <a:srgbClr val="000000"/>
+                </a:solidFill>
+                <a:latin typeface="TH Sarabun New"/>
+              </a:rPr>
+              <a:t>( +</a:t>
+            </a:r>
+          </a:p>
+        </p:txBody>
+      </p:sp>
+      <p:sp>
+        <p:nvSpPr>
+          <p:cNvPr id="25" name="Rectangle 24"/>
+          <p:cNvSpPr/>
+          <p:nvPr/>
+        </p:nvSpPr>
+        <p:spPr>
+          <a:xfrm>
+            <a:off x="8915400" y="2651760"/>
+            <a:ext cx="3566160" cy="484632"/>
+          </a:xfrm>
+          <a:prstGeom prst="rect">
+            <a:avLst/>
+          </a:prstGeom>
+          <a:solidFill>
+            <a:srgbClr val="FFFFFF"/>
+          </a:solidFill>
+          <a:ln w="10160">
+            <a:solidFill>
+              <a:srgbClr val="C9D5E5"/>
+            </a:solidFill>
+          </a:ln>
+        </p:spPr>
+        <p:style>
+          <a:lnRef idx="1">
+            <a:schemeClr val="accent1"/>
+          </a:lnRef>
+          <a:fillRef idx="3">
+            <a:schemeClr val="accent1"/>
+          </a:fillRef>
+          <a:effectRef idx="2">
+            <a:schemeClr val="accent1"/>
+          </a:effectRef>
+          <a:fontRef idx="minor">
+            <a:schemeClr val="lt1"/>
+          </a:fontRef>
+        </p:style>
+        <p:txBody>
+          <a:bodyPr rtlCol="0" anchor="ctr" lIns="73152" rIns="73152" tIns="73152" bIns="73152"/>
+          <a:lstStyle/>
+          <a:p>
+            <a:pPr algn="ctr"/>
+            <a:r>
+              <a:rPr sz="1230" b="0">
+                <a:solidFill>
+                  <a:srgbClr val="000000"/>
+                </a:solidFill>
+                <a:latin typeface="TH Sarabun New"/>
+              </a:rPr>
+              <a:t>3</a:t>
+            </a:r>
+          </a:p>
+        </p:txBody>
+      </p:sp>
+      <p:sp>
+        <p:nvSpPr>
+          <p:cNvPr id="26" name="Rectangle 25"/>
+          <p:cNvSpPr/>
+          <p:nvPr/>
+        </p:nvSpPr>
+        <p:spPr>
+          <a:xfrm>
+            <a:off x="548640" y="3136392"/>
+            <a:ext cx="594360" cy="484632"/>
+          </a:xfrm>
+          <a:prstGeom prst="rect">
+            <a:avLst/>
+          </a:prstGeom>
+          <a:solidFill>
+            <a:srgbClr val="FFFFFF"/>
+          </a:solidFill>
+          <a:ln w="10160">
+            <a:solidFill>
+              <a:srgbClr val="C9D5E5"/>
+            </a:solidFill>
+          </a:ln>
+        </p:spPr>
+        <p:style>
+          <a:lnRef idx="1">
+            <a:schemeClr val="accent1"/>
+          </a:lnRef>
+          <a:fillRef idx="3">
+            <a:schemeClr val="accent1"/>
+          </a:fillRef>
+          <a:effectRef idx="2">
+            <a:schemeClr val="accent1"/>
+          </a:effectRef>
+          <a:fontRef idx="minor">
+            <a:schemeClr val="lt1"/>
+          </a:fontRef>
+        </p:style>
+        <p:txBody>
+          <a:bodyPr rtlCol="0" anchor="ctr" lIns="73152" rIns="73152" tIns="73152" bIns="73152"/>
+          <a:lstStyle/>
+          <a:p>
+            <a:pPr algn="ctr"/>
+            <a:r>
+              <a:rPr sz="1230" b="0">
+                <a:solidFill>
+                  <a:srgbClr val="000000"/>
+                </a:solidFill>
+                <a:latin typeface="TH Sarabun New"/>
+              </a:rPr>
+              <a:t>4</a:t>
+            </a:r>
+          </a:p>
+        </p:txBody>
+      </p:sp>
+      <p:sp>
+        <p:nvSpPr>
+          <p:cNvPr id="27" name="Rectangle 26"/>
+          <p:cNvSpPr/>
+          <p:nvPr/>
+        </p:nvSpPr>
+        <p:spPr>
+          <a:xfrm>
+            <a:off x="1143000" y="3136392"/>
+            <a:ext cx="1325880" cy="484632"/>
+          </a:xfrm>
+          <a:prstGeom prst="rect">
+            <a:avLst/>
+          </a:prstGeom>
+          <a:solidFill>
+            <a:srgbClr val="FFFFFF"/>
+          </a:solidFill>
+          <a:ln w="10160">
+            <a:solidFill>
+              <a:srgbClr val="C9D5E5"/>
+            </a:solidFill>
+          </a:ln>
+        </p:spPr>
+        <p:style>
+          <a:lnRef idx="1">
+            <a:schemeClr val="accent1"/>
+          </a:lnRef>
+          <a:fillRef idx="3">
+            <a:schemeClr val="accent1"/>
+          </a:fillRef>
+          <a:effectRef idx="2">
+            <a:schemeClr val="accent1"/>
+          </a:effectRef>
+          <a:fontRef idx="minor">
+            <a:schemeClr val="lt1"/>
+          </a:fontRef>
+        </p:style>
+        <p:txBody>
+          <a:bodyPr rtlCol="0" anchor="ctr" lIns="73152" rIns="73152" tIns="73152" bIns="73152"/>
+          <a:lstStyle/>
+          <a:p>
+            <a:pPr algn="ctr"/>
+            <a:r>
+              <a:rPr sz="1230" b="0">
+                <a:solidFill>
+                  <a:srgbClr val="000000"/>
+                </a:solidFill>
+                <a:latin typeface="TH Sarabun New"/>
+              </a:rPr>
+              <a:t>4</a:t>
+            </a:r>
+          </a:p>
+        </p:txBody>
+      </p:sp>
+      <p:sp>
+        <p:nvSpPr>
+          <p:cNvPr id="28" name="Rectangle 27"/>
+          <p:cNvSpPr/>
+          <p:nvPr/>
+        </p:nvSpPr>
+        <p:spPr>
+          <a:xfrm>
+            <a:off x="2468880" y="3136392"/>
+            <a:ext cx="3657600" cy="484632"/>
+          </a:xfrm>
+          <a:prstGeom prst="rect">
+            <a:avLst/>
+          </a:prstGeom>
+          <a:solidFill>
+            <a:srgbClr val="FFFFFF"/>
+          </a:solidFill>
+          <a:ln w="10160">
+            <a:solidFill>
+              <a:srgbClr val="C9D5E5"/>
+            </a:solidFill>
+          </a:ln>
+        </p:spPr>
+        <p:style>
+          <a:lnRef idx="1">
+            <a:schemeClr val="accent1"/>
+          </a:lnRef>
+          <a:fillRef idx="3">
+            <a:schemeClr val="accent1"/>
+          </a:fillRef>
+          <a:effectRef idx="2">
+            <a:schemeClr val="accent1"/>
+          </a:effectRef>
+          <a:fontRef idx="minor">
+            <a:schemeClr val="lt1"/>
+          </a:fontRef>
+        </p:style>
+        <p:txBody>
+          <a:bodyPr rtlCol="0" anchor="ctr" lIns="73152" rIns="73152" tIns="73152" bIns="73152"/>
+          <a:lstStyle/>
+          <a:p>
+            <a:pPr algn="ctr"/>
+            <a:r>
+              <a:rPr sz="1230" b="0">
+                <a:solidFill>
+                  <a:srgbClr val="000000"/>
+                </a:solidFill>
+                <a:latin typeface="TH Sarabun New"/>
+              </a:rPr>
+              <a:t>push 4</a:t>
+            </a:r>
+          </a:p>
+        </p:txBody>
+      </p:sp>
+      <p:sp>
+        <p:nvSpPr>
+          <p:cNvPr id="29" name="Rectangle 28"/>
+          <p:cNvSpPr/>
+          <p:nvPr/>
+        </p:nvSpPr>
+        <p:spPr>
+          <a:xfrm>
+            <a:off x="6126480" y="3136392"/>
+            <a:ext cx="2788920" cy="484632"/>
+          </a:xfrm>
+          <a:prstGeom prst="rect">
+            <a:avLst/>
+          </a:prstGeom>
+          <a:solidFill>
+            <a:srgbClr val="FFFFFF"/>
+          </a:solidFill>
+          <a:ln w="10160">
+            <a:solidFill>
+              <a:srgbClr val="C9D5E5"/>
+            </a:solidFill>
+          </a:ln>
+        </p:spPr>
+        <p:style>
+          <a:lnRef idx="1">
+            <a:schemeClr val="accent1"/>
+          </a:lnRef>
+          <a:fillRef idx="3">
+            <a:schemeClr val="accent1"/>
+          </a:fillRef>
+          <a:effectRef idx="2">
+            <a:schemeClr val="accent1"/>
+          </a:effectRef>
+          <a:fontRef idx="minor">
+            <a:schemeClr val="lt1"/>
+          </a:fontRef>
+        </p:style>
+        <p:txBody>
+          <a:bodyPr rtlCol="0" anchor="ctr" lIns="73152" rIns="73152" tIns="73152" bIns="73152"/>
+          <a:lstStyle/>
+          <a:p>
+            <a:pPr algn="ctr"/>
+            <a:r>
+              <a:rPr sz="1230" b="0">
+                <a:solidFill>
+                  <a:srgbClr val="000000"/>
+                </a:solidFill>
+                <a:latin typeface="TH Sarabun New"/>
+              </a:rPr>
+              <a:t>( +</a:t>
+            </a:r>
+          </a:p>
+        </p:txBody>
+      </p:sp>
+      <p:sp>
+        <p:nvSpPr>
+          <p:cNvPr id="30" name="Rectangle 29"/>
+          <p:cNvSpPr/>
+          <p:nvPr/>
+        </p:nvSpPr>
+        <p:spPr>
+          <a:xfrm>
+            <a:off x="8915400" y="3136392"/>
+            <a:ext cx="3566160" cy="484632"/>
+          </a:xfrm>
+          <a:prstGeom prst="rect">
+            <a:avLst/>
+          </a:prstGeom>
+          <a:solidFill>
+            <a:srgbClr val="FFFFFF"/>
+          </a:solidFill>
+          <a:ln w="10160">
+            <a:solidFill>
+              <a:srgbClr val="C9D5E5"/>
+            </a:solidFill>
+          </a:ln>
+        </p:spPr>
+        <p:style>
+          <a:lnRef idx="1">
+            <a:schemeClr val="accent1"/>
+          </a:lnRef>
+          <a:fillRef idx="3">
+            <a:schemeClr val="accent1"/>
+          </a:fillRef>
+          <a:effectRef idx="2">
+            <a:schemeClr val="accent1"/>
+          </a:effectRef>
+          <a:fontRef idx="minor">
+            <a:schemeClr val="lt1"/>
+          </a:fontRef>
+        </p:style>
+        <p:txBody>
+          <a:bodyPr rtlCol="0" anchor="ctr" lIns="73152" rIns="73152" tIns="73152" bIns="73152"/>
+          <a:lstStyle/>
+          <a:p>
+            <a:pPr algn="ctr"/>
+            <a:r>
+              <a:rPr sz="1230" b="0">
+                <a:solidFill>
+                  <a:srgbClr val="000000"/>
+                </a:solidFill>
+                <a:latin typeface="TH Sarabun New"/>
+              </a:rPr>
+              <a:t>3, 4</a:t>
+            </a:r>
+          </a:p>
+        </p:txBody>
+      </p:sp>
+      <p:sp>
+        <p:nvSpPr>
+          <p:cNvPr id="31" name="Rectangle 30"/>
+          <p:cNvSpPr/>
+          <p:nvPr/>
+        </p:nvSpPr>
+        <p:spPr>
+          <a:xfrm>
+            <a:off x="548640" y="3621024"/>
+            <a:ext cx="594360" cy="484632"/>
+          </a:xfrm>
+          <a:prstGeom prst="rect">
+            <a:avLst/>
+          </a:prstGeom>
+          <a:solidFill>
+            <a:srgbClr val="FFFFFF"/>
+          </a:solidFill>
+          <a:ln w="10160">
+            <a:solidFill>
+              <a:srgbClr val="C9D5E5"/>
+            </a:solidFill>
+          </a:ln>
+        </p:spPr>
+        <p:style>
+          <a:lnRef idx="1">
+            <a:schemeClr val="accent1"/>
+          </a:lnRef>
+          <a:fillRef idx="3">
+            <a:schemeClr val="accent1"/>
+          </a:fillRef>
+          <a:effectRef idx="2">
+            <a:schemeClr val="accent1"/>
+          </a:effectRef>
+          <a:fontRef idx="minor">
+            <a:schemeClr val="lt1"/>
+          </a:fontRef>
+        </p:style>
+        <p:txBody>
+          <a:bodyPr rtlCol="0" anchor="ctr" lIns="73152" rIns="73152" tIns="73152" bIns="73152"/>
+          <a:lstStyle/>
+          <a:p>
+            <a:pPr algn="ctr"/>
+            <a:r>
+              <a:rPr sz="1230" b="0">
+                <a:solidFill>
+                  <a:srgbClr val="000000"/>
+                </a:solidFill>
+                <a:latin typeface="TH Sarabun New"/>
+              </a:rPr>
+              <a:t>5</a:t>
+            </a:r>
+          </a:p>
+        </p:txBody>
+      </p:sp>
+      <p:sp>
+        <p:nvSpPr>
+          <p:cNvPr id="32" name="Rectangle 31"/>
+          <p:cNvSpPr/>
+          <p:nvPr/>
+        </p:nvSpPr>
+        <p:spPr>
+          <a:xfrm>
+            <a:off x="1143000" y="3621024"/>
+            <a:ext cx="1325880" cy="484632"/>
+          </a:xfrm>
+          <a:prstGeom prst="rect">
+            <a:avLst/>
+          </a:prstGeom>
+          <a:solidFill>
+            <a:srgbClr val="FFFFFF"/>
+          </a:solidFill>
+          <a:ln w="10160">
+            <a:solidFill>
+              <a:srgbClr val="C9D5E5"/>
+            </a:solidFill>
+          </a:ln>
+        </p:spPr>
+        <p:style>
+          <a:lnRef idx="1">
+            <a:schemeClr val="accent1"/>
+          </a:lnRef>
+          <a:fillRef idx="3">
+            <a:schemeClr val="accent1"/>
+          </a:fillRef>
+          <a:effectRef idx="2">
+            <a:schemeClr val="accent1"/>
+          </a:effectRef>
+          <a:fontRef idx="minor">
+            <a:schemeClr val="lt1"/>
+          </a:fontRef>
+        </p:style>
+        <p:txBody>
+          <a:bodyPr rtlCol="0" anchor="ctr" lIns="73152" rIns="73152" tIns="73152" bIns="73152"/>
+          <a:lstStyle/>
+          <a:p>
+            <a:pPr algn="ctr"/>
+            <a:r>
+              <a:rPr sz="1230" b="0">
+                <a:solidFill>
+                  <a:srgbClr val="000000"/>
+                </a:solidFill>
+                <a:latin typeface="TH Sarabun New"/>
+              </a:rPr>
+              <a:t>)</a:t>
+            </a:r>
+          </a:p>
+        </p:txBody>
+      </p:sp>
+      <p:sp>
+        <p:nvSpPr>
+          <p:cNvPr id="33" name="Rectangle 32"/>
+          <p:cNvSpPr/>
+          <p:nvPr/>
+        </p:nvSpPr>
+        <p:spPr>
+          <a:xfrm>
+            <a:off x="2468880" y="3621024"/>
+            <a:ext cx="3657600" cy="484632"/>
+          </a:xfrm>
+          <a:prstGeom prst="rect">
+            <a:avLst/>
+          </a:prstGeom>
+          <a:solidFill>
+            <a:srgbClr val="FFFFFF"/>
+          </a:solidFill>
+          <a:ln w="10160">
+            <a:solidFill>
+              <a:srgbClr val="C9D5E5"/>
+            </a:solidFill>
+          </a:ln>
+        </p:spPr>
+        <p:style>
+          <a:lnRef idx="1">
+            <a:schemeClr val="accent1"/>
+          </a:lnRef>
+          <a:fillRef idx="3">
+            <a:schemeClr val="accent1"/>
+          </a:fillRef>
+          <a:effectRef idx="2">
+            <a:schemeClr val="accent1"/>
+          </a:effectRef>
+          <a:fontRef idx="minor">
+            <a:schemeClr val="lt1"/>
+          </a:fontRef>
+        </p:style>
+        <p:txBody>
+          <a:bodyPr rtlCol="0" anchor="ctr" lIns="73152" rIns="73152" tIns="73152" bIns="73152"/>
+          <a:lstStyle/>
+          <a:p>
+            <a:pPr algn="ctr"/>
+            <a:r>
+              <a:rPr sz="1230" b="0">
+                <a:solidFill>
+                  <a:srgbClr val="000000"/>
+                </a:solidFill>
+                <a:latin typeface="TH Sarabun New"/>
+              </a:rPr>
+              <a:t>pop + → 3+4=7</a:t>
+            </a:r>
+          </a:p>
+        </p:txBody>
+      </p:sp>
+      <p:sp>
+        <p:nvSpPr>
+          <p:cNvPr id="34" name="Rectangle 33"/>
+          <p:cNvSpPr/>
+          <p:nvPr/>
+        </p:nvSpPr>
+        <p:spPr>
+          <a:xfrm>
+            <a:off x="6126480" y="3621024"/>
+            <a:ext cx="2788920" cy="484632"/>
+          </a:xfrm>
+          <a:prstGeom prst="rect">
+            <a:avLst/>
+          </a:prstGeom>
+          <a:solidFill>
+            <a:srgbClr val="FFFFFF"/>
+          </a:solidFill>
+          <a:ln w="10160">
+            <a:solidFill>
+              <a:srgbClr val="C9D5E5"/>
+            </a:solidFill>
+          </a:ln>
+        </p:spPr>
+        <p:style>
+          <a:lnRef idx="1">
+            <a:schemeClr val="accent1"/>
+          </a:lnRef>
+          <a:fillRef idx="3">
+            <a:schemeClr val="accent1"/>
+          </a:fillRef>
+          <a:effectRef idx="2">
+            <a:schemeClr val="accent1"/>
+          </a:effectRef>
+          <a:fontRef idx="minor">
+            <a:schemeClr val="lt1"/>
+          </a:fontRef>
+        </p:style>
+        <p:txBody>
+          <a:bodyPr rtlCol="0" anchor="ctr" lIns="73152" rIns="73152" tIns="73152" bIns="73152"/>
+          <a:lstStyle/>
+          <a:p>
+            <a:pPr algn="ctr"/>
+            <a:r>
+              <a:rPr sz="1230" b="0">
+                <a:solidFill>
+                  <a:srgbClr val="000000"/>
+                </a:solidFill>
+                <a:latin typeface="TH Sarabun New"/>
+              </a:rPr>
+              <a:t>∅</a:t>
+            </a:r>
+          </a:p>
+        </p:txBody>
+      </p:sp>
+      <p:sp>
+        <p:nvSpPr>
+          <p:cNvPr id="35" name="Rectangle 34"/>
+          <p:cNvSpPr/>
+          <p:nvPr/>
+        </p:nvSpPr>
+        <p:spPr>
+          <a:xfrm>
+            <a:off x="8915400" y="3621024"/>
+            <a:ext cx="3566160" cy="484632"/>
+          </a:xfrm>
+          <a:prstGeom prst="rect">
+            <a:avLst/>
+          </a:prstGeom>
+          <a:solidFill>
+            <a:srgbClr val="FFFFFF"/>
+          </a:solidFill>
+          <a:ln w="10160">
+            <a:solidFill>
+              <a:srgbClr val="C9D5E5"/>
+            </a:solidFill>
+          </a:ln>
+        </p:spPr>
+        <p:style>
+          <a:lnRef idx="1">
+            <a:schemeClr val="accent1"/>
+          </a:lnRef>
+          <a:fillRef idx="3">
+            <a:schemeClr val="accent1"/>
+          </a:fillRef>
+          <a:effectRef idx="2">
+            <a:schemeClr val="accent1"/>
+          </a:effectRef>
+          <a:fontRef idx="minor">
+            <a:schemeClr val="lt1"/>
+          </a:fontRef>
+        </p:style>
+        <p:txBody>
+          <a:bodyPr rtlCol="0" anchor="ctr" lIns="73152" rIns="73152" tIns="73152" bIns="73152"/>
+          <a:lstStyle/>
+          <a:p>
+            <a:pPr algn="ctr"/>
+            <a:r>
+              <a:rPr sz="1230" b="0">
+                <a:solidFill>
+                  <a:srgbClr val="000000"/>
+                </a:solidFill>
+                <a:latin typeface="TH Sarabun New"/>
+              </a:rPr>
+              <a:t>7</a:t>
+            </a:r>
+          </a:p>
+        </p:txBody>
+      </p:sp>
+      <p:sp>
+        <p:nvSpPr>
+          <p:cNvPr id="36" name="Rectangle 35"/>
+          <p:cNvSpPr/>
+          <p:nvPr/>
+        </p:nvSpPr>
+        <p:spPr>
+          <a:xfrm>
+            <a:off x="548640" y="4105656"/>
+            <a:ext cx="594360" cy="484632"/>
+          </a:xfrm>
+          <a:prstGeom prst="rect">
+            <a:avLst/>
+          </a:prstGeom>
+          <a:solidFill>
+            <a:srgbClr val="F9FBFD"/>
+          </a:solidFill>
+          <a:ln w="10160">
+            <a:solidFill>
+              <a:srgbClr val="C9D5E5"/>
+            </a:solidFill>
+          </a:ln>
+        </p:spPr>
+        <p:style>
+          <a:lnRef idx="1">
+            <a:schemeClr val="accent1"/>
+          </a:lnRef>
+          <a:fillRef idx="3">
+            <a:schemeClr val="accent1"/>
+          </a:fillRef>
+          <a:effectRef idx="2">
+            <a:schemeClr val="accent1"/>
+          </a:effectRef>
+          <a:fontRef idx="minor">
+            <a:schemeClr val="lt1"/>
+          </a:fontRef>
+        </p:style>
+        <p:txBody>
+          <a:bodyPr rtlCol="0" anchor="ctr" lIns="73152" rIns="73152" tIns="73152" bIns="73152"/>
+          <a:lstStyle/>
+          <a:p>
+            <a:pPr algn="ctr"/>
+            <a:r>
+              <a:rPr sz="1230" b="0">
+                <a:solidFill>
+                  <a:srgbClr val="000000"/>
+                </a:solidFill>
+                <a:latin typeface="TH Sarabun New"/>
+              </a:rPr>
+              <a:t>6</a:t>
+            </a:r>
+          </a:p>
+        </p:txBody>
+      </p:sp>
+      <p:sp>
+        <p:nvSpPr>
+          <p:cNvPr id="37" name="Rectangle 36"/>
+          <p:cNvSpPr/>
+          <p:nvPr/>
+        </p:nvSpPr>
+        <p:spPr>
+          <a:xfrm>
+            <a:off x="1143000" y="4105656"/>
+            <a:ext cx="1325880" cy="484632"/>
+          </a:xfrm>
+          <a:prstGeom prst="rect">
+            <a:avLst/>
+          </a:prstGeom>
+          <a:solidFill>
+            <a:srgbClr val="F9FBFD"/>
+          </a:solidFill>
+          <a:ln w="10160">
+            <a:solidFill>
+              <a:srgbClr val="C9D5E5"/>
+            </a:solidFill>
+          </a:ln>
+        </p:spPr>
+        <p:style>
+          <a:lnRef idx="1">
+            <a:schemeClr val="accent1"/>
+          </a:lnRef>
+          <a:fillRef idx="3">
+            <a:schemeClr val="accent1"/>
+          </a:fillRef>
+          <a:effectRef idx="2">
+            <a:schemeClr val="accent1"/>
+          </a:effectRef>
+          <a:fontRef idx="minor">
+            <a:schemeClr val="lt1"/>
+          </a:fontRef>
+        </p:style>
+        <p:txBody>
+          <a:bodyPr rtlCol="0" anchor="ctr" lIns="73152" rIns="73152" tIns="73152" bIns="73152"/>
+          <a:lstStyle/>
+          <a:p>
+            <a:pPr algn="ctr"/>
+            <a:r>
+              <a:rPr sz="1230" b="0">
+                <a:solidFill>
+                  <a:srgbClr val="000000"/>
+                </a:solidFill>
+                <a:latin typeface="TH Sarabun New"/>
+              </a:rPr>
+              <a:t>*</a:t>
+            </a:r>
+          </a:p>
+        </p:txBody>
+      </p:sp>
+      <p:sp>
+        <p:nvSpPr>
+          <p:cNvPr id="38" name="Rectangle 37"/>
+          <p:cNvSpPr/>
+          <p:nvPr/>
+        </p:nvSpPr>
+        <p:spPr>
+          <a:xfrm>
+            <a:off x="2468880" y="4105656"/>
+            <a:ext cx="3657600" cy="484632"/>
+          </a:xfrm>
+          <a:prstGeom prst="rect">
+            <a:avLst/>
+          </a:prstGeom>
+          <a:solidFill>
+            <a:srgbClr val="F9FBFD"/>
+          </a:solidFill>
+          <a:ln w="10160">
+            <a:solidFill>
+              <a:srgbClr val="C9D5E5"/>
+            </a:solidFill>
+          </a:ln>
+        </p:spPr>
+        <p:style>
+          <a:lnRef idx="1">
+            <a:schemeClr val="accent1"/>
+          </a:lnRef>
+          <a:fillRef idx="3">
+            <a:schemeClr val="accent1"/>
+          </a:fillRef>
+          <a:effectRef idx="2">
+            <a:schemeClr val="accent1"/>
+          </a:effectRef>
+          <a:fontRef idx="minor">
+            <a:schemeClr val="lt1"/>
+          </a:fontRef>
+        </p:style>
+        <p:txBody>
+          <a:bodyPr rtlCol="0" anchor="ctr" lIns="73152" rIns="73152" tIns="73152" bIns="73152"/>
+          <a:lstStyle/>
+          <a:p>
+            <a:pPr algn="ctr"/>
+            <a:r>
+              <a:rPr sz="1230" b="0">
+                <a:solidFill>
+                  <a:srgbClr val="000000"/>
+                </a:solidFill>
+                <a:latin typeface="TH Sarabun New"/>
+              </a:rPr>
+              <a:t>push *</a:t>
+            </a:r>
+          </a:p>
+        </p:txBody>
+      </p:sp>
+      <p:sp>
+        <p:nvSpPr>
+          <p:cNvPr id="39" name="Rectangle 38"/>
+          <p:cNvSpPr/>
+          <p:nvPr/>
+        </p:nvSpPr>
+        <p:spPr>
+          <a:xfrm>
+            <a:off x="6126480" y="4105656"/>
+            <a:ext cx="2788920" cy="484632"/>
+          </a:xfrm>
+          <a:prstGeom prst="rect">
+            <a:avLst/>
+          </a:prstGeom>
+          <a:solidFill>
+            <a:srgbClr val="F9FBFD"/>
+          </a:solidFill>
+          <a:ln w="10160">
+            <a:solidFill>
+              <a:srgbClr val="C9D5E5"/>
+            </a:solidFill>
+          </a:ln>
+        </p:spPr>
+        <p:style>
+          <a:lnRef idx="1">
+            <a:schemeClr val="accent1"/>
+          </a:lnRef>
+          <a:fillRef idx="3">
+            <a:schemeClr val="accent1"/>
+          </a:fillRef>
+          <a:effectRef idx="2">
+            <a:schemeClr val="accent1"/>
+          </a:effectRef>
+          <a:fontRef idx="minor">
+            <a:schemeClr val="lt1"/>
+          </a:fontRef>
+        </p:style>
+        <p:txBody>
+          <a:bodyPr rtlCol="0" anchor="ctr" lIns="73152" rIns="73152" tIns="73152" bIns="73152"/>
+          <a:lstStyle/>
+          <a:p>
+            <a:pPr algn="ctr"/>
+            <a:r>
+              <a:rPr sz="1230" b="0">
+                <a:solidFill>
+                  <a:srgbClr val="000000"/>
+                </a:solidFill>
+                <a:latin typeface="TH Sarabun New"/>
+              </a:rPr>
+              <a:t>*</a:t>
+            </a:r>
+          </a:p>
+        </p:txBody>
+      </p:sp>
+      <p:sp>
+        <p:nvSpPr>
+          <p:cNvPr id="40" name="Rectangle 39"/>
+          <p:cNvSpPr/>
+          <p:nvPr/>
+        </p:nvSpPr>
+        <p:spPr>
+          <a:xfrm>
+            <a:off x="8915400" y="4105656"/>
+            <a:ext cx="3566160" cy="484632"/>
+          </a:xfrm>
+          <a:prstGeom prst="rect">
+            <a:avLst/>
+          </a:prstGeom>
+          <a:solidFill>
+            <a:srgbClr val="F9FBFD"/>
+          </a:solidFill>
+          <a:ln w="10160">
+            <a:solidFill>
+              <a:srgbClr val="C9D5E5"/>
+            </a:solidFill>
+          </a:ln>
+        </p:spPr>
+        <p:style>
+          <a:lnRef idx="1">
+            <a:schemeClr val="accent1"/>
+          </a:lnRef>
+          <a:fillRef idx="3">
+            <a:schemeClr val="accent1"/>
+          </a:fillRef>
+          <a:effectRef idx="2">
+            <a:schemeClr val="accent1"/>
+          </a:effectRef>
+          <a:fontRef idx="minor">
+            <a:schemeClr val="lt1"/>
+          </a:fontRef>
+        </p:style>
+        <p:txBody>
+          <a:bodyPr rtlCol="0" anchor="ctr" lIns="73152" rIns="73152" tIns="73152" bIns="73152"/>
+          <a:lstStyle/>
+          <a:p>
+            <a:pPr algn="ctr"/>
+            <a:r>
+              <a:rPr sz="1230" b="0">
+                <a:solidFill>
+                  <a:srgbClr val="000000"/>
+                </a:solidFill>
+                <a:latin typeface="TH Sarabun New"/>
+              </a:rPr>
+              <a:t>7</a:t>
+            </a:r>
+          </a:p>
+        </p:txBody>
+      </p:sp>
+      <p:sp>
+        <p:nvSpPr>
+          <p:cNvPr id="41" name="Rectangle 40"/>
+          <p:cNvSpPr/>
+          <p:nvPr/>
+        </p:nvSpPr>
+        <p:spPr>
+          <a:xfrm>
+            <a:off x="548640" y="4590288"/>
+            <a:ext cx="594360" cy="484632"/>
+          </a:xfrm>
+          <a:prstGeom prst="rect">
+            <a:avLst/>
+          </a:prstGeom>
+          <a:solidFill>
+            <a:srgbClr val="F9FBFD"/>
+          </a:solidFill>
+          <a:ln w="10160">
+            <a:solidFill>
+              <a:srgbClr val="C9D5E5"/>
+            </a:solidFill>
+          </a:ln>
+        </p:spPr>
+        <p:style>
+          <a:lnRef idx="1">
+            <a:schemeClr val="accent1"/>
+          </a:lnRef>
+          <a:fillRef idx="3">
+            <a:schemeClr val="accent1"/>
+          </a:fillRef>
+          <a:effectRef idx="2">
+            <a:schemeClr val="accent1"/>
+          </a:effectRef>
+          <a:fontRef idx="minor">
+            <a:schemeClr val="lt1"/>
+          </a:fontRef>
+        </p:style>
+        <p:txBody>
+          <a:bodyPr rtlCol="0" anchor="ctr" lIns="73152" rIns="73152" tIns="73152" bIns="73152"/>
+          <a:lstStyle/>
+          <a:p>
+            <a:pPr algn="ctr"/>
+            <a:r>
+              <a:rPr sz="1230" b="0">
+                <a:solidFill>
+                  <a:srgbClr val="000000"/>
+                </a:solidFill>
+                <a:latin typeface="TH Sarabun New"/>
+              </a:rPr>
+              <a:t>7</a:t>
+            </a:r>
+          </a:p>
+        </p:txBody>
+      </p:sp>
+      <p:sp>
+        <p:nvSpPr>
+          <p:cNvPr id="42" name="Rectangle 41"/>
+          <p:cNvSpPr/>
+          <p:nvPr/>
+        </p:nvSpPr>
+        <p:spPr>
+          <a:xfrm>
+            <a:off x="1143000" y="4590288"/>
+            <a:ext cx="1325880" cy="484632"/>
+          </a:xfrm>
+          <a:prstGeom prst="rect">
+            <a:avLst/>
+          </a:prstGeom>
+          <a:solidFill>
+            <a:srgbClr val="F9FBFD"/>
+          </a:solidFill>
+          <a:ln w="10160">
+            <a:solidFill>
+              <a:srgbClr val="C9D5E5"/>
+            </a:solidFill>
+          </a:ln>
+        </p:spPr>
+        <p:style>
+          <a:lnRef idx="1">
+            <a:schemeClr val="accent1"/>
+          </a:lnRef>
+          <a:fillRef idx="3">
+            <a:schemeClr val="accent1"/>
+          </a:fillRef>
+          <a:effectRef idx="2">
+            <a:schemeClr val="accent1"/>
+          </a:effectRef>
+          <a:fontRef idx="minor">
+            <a:schemeClr val="lt1"/>
+          </a:fontRef>
+        </p:style>
+        <p:txBody>
+          <a:bodyPr rtlCol="0" anchor="ctr" lIns="73152" rIns="73152" tIns="73152" bIns="73152"/>
+          <a:lstStyle/>
+          <a:p>
+            <a:pPr algn="ctr"/>
+            <a:r>
+              <a:rPr sz="1230" b="0">
+                <a:solidFill>
+                  <a:srgbClr val="000000"/>
+                </a:solidFill>
+                <a:latin typeface="TH Sarabun New"/>
+              </a:rPr>
+              <a:t>2</a:t>
+            </a:r>
+          </a:p>
+        </p:txBody>
+      </p:sp>
+      <p:sp>
+        <p:nvSpPr>
+          <p:cNvPr id="43" name="Rectangle 42"/>
+          <p:cNvSpPr/>
+          <p:nvPr/>
+        </p:nvSpPr>
+        <p:spPr>
+          <a:xfrm>
+            <a:off x="2468880" y="4590288"/>
+            <a:ext cx="3657600" cy="484632"/>
+          </a:xfrm>
+          <a:prstGeom prst="rect">
+            <a:avLst/>
+          </a:prstGeom>
+          <a:solidFill>
+            <a:srgbClr val="F9FBFD"/>
+          </a:solidFill>
+          <a:ln w="10160">
+            <a:solidFill>
+              <a:srgbClr val="C9D5E5"/>
+            </a:solidFill>
+          </a:ln>
+        </p:spPr>
+        <p:style>
+          <a:lnRef idx="1">
+            <a:schemeClr val="accent1"/>
+          </a:lnRef>
+          <a:fillRef idx="3">
+            <a:schemeClr val="accent1"/>
+          </a:fillRef>
+          <a:effectRef idx="2">
+            <a:schemeClr val="accent1"/>
+          </a:effectRef>
+          <a:fontRef idx="minor">
+            <a:schemeClr val="lt1"/>
+          </a:fontRef>
+        </p:style>
+        <p:txBody>
+          <a:bodyPr rtlCol="0" anchor="ctr" lIns="73152" rIns="73152" tIns="73152" bIns="73152"/>
+          <a:lstStyle/>
+          <a:p>
+            <a:pPr algn="ctr"/>
+            <a:r>
+              <a:rPr sz="1230" b="0">
+                <a:solidFill>
+                  <a:srgbClr val="000000"/>
+                </a:solidFill>
+                <a:latin typeface="TH Sarabun New"/>
+              </a:rPr>
+              <a:t>push 2</a:t>
+            </a:r>
+          </a:p>
+        </p:txBody>
+      </p:sp>
+      <p:sp>
+        <p:nvSpPr>
+          <p:cNvPr id="44" name="Rectangle 43"/>
+          <p:cNvSpPr/>
+          <p:nvPr/>
+        </p:nvSpPr>
+        <p:spPr>
+          <a:xfrm>
+            <a:off x="6126480" y="4590288"/>
+            <a:ext cx="2788920" cy="484632"/>
+          </a:xfrm>
+          <a:prstGeom prst="rect">
+            <a:avLst/>
+          </a:prstGeom>
+          <a:solidFill>
+            <a:srgbClr val="F9FBFD"/>
+          </a:solidFill>
+          <a:ln w="10160">
+            <a:solidFill>
+              <a:srgbClr val="C9D5E5"/>
+            </a:solidFill>
+          </a:ln>
+        </p:spPr>
+        <p:style>
+          <a:lnRef idx="1">
+            <a:schemeClr val="accent1"/>
+          </a:lnRef>
+          <a:fillRef idx="3">
+            <a:schemeClr val="accent1"/>
+          </a:fillRef>
+          <a:effectRef idx="2">
+            <a:schemeClr val="accent1"/>
+          </a:effectRef>
+          <a:fontRef idx="minor">
+            <a:schemeClr val="lt1"/>
+          </a:fontRef>
+        </p:style>
+        <p:txBody>
+          <a:bodyPr rtlCol="0" anchor="ctr" lIns="73152" rIns="73152" tIns="73152" bIns="73152"/>
+          <a:lstStyle/>
+          <a:p>
+            <a:pPr algn="ctr"/>
+            <a:r>
+              <a:rPr sz="1230" b="0">
+                <a:solidFill>
+                  <a:srgbClr val="000000"/>
+                </a:solidFill>
+                <a:latin typeface="TH Sarabun New"/>
+              </a:rPr>
+              <a:t>*</a:t>
+            </a:r>
+          </a:p>
+        </p:txBody>
+      </p:sp>
+      <p:sp>
+        <p:nvSpPr>
+          <p:cNvPr id="45" name="Rectangle 44"/>
+          <p:cNvSpPr/>
+          <p:nvPr/>
+        </p:nvSpPr>
+        <p:spPr>
+          <a:xfrm>
+            <a:off x="8915400" y="4590288"/>
+            <a:ext cx="3566160" cy="484632"/>
+          </a:xfrm>
+          <a:prstGeom prst="rect">
+            <a:avLst/>
+          </a:prstGeom>
+          <a:solidFill>
+            <a:srgbClr val="F9FBFD"/>
+          </a:solidFill>
+          <a:ln w="10160">
+            <a:solidFill>
+              <a:srgbClr val="C9D5E5"/>
+            </a:solidFill>
+          </a:ln>
+        </p:spPr>
+        <p:style>
+          <a:lnRef idx="1">
+            <a:schemeClr val="accent1"/>
+          </a:lnRef>
+          <a:fillRef idx="3">
+            <a:schemeClr val="accent1"/>
+          </a:fillRef>
+          <a:effectRef idx="2">
+            <a:schemeClr val="accent1"/>
+          </a:effectRef>
+          <a:fontRef idx="minor">
+            <a:schemeClr val="lt1"/>
+          </a:fontRef>
+        </p:style>
+        <p:txBody>
+          <a:bodyPr rtlCol="0" anchor="ctr" lIns="73152" rIns="73152" tIns="73152" bIns="73152"/>
+          <a:lstStyle/>
+          <a:p>
+            <a:pPr algn="ctr"/>
+            <a:r>
+              <a:rPr sz="1230" b="0">
+                <a:solidFill>
+                  <a:srgbClr val="000000"/>
+                </a:solidFill>
+                <a:latin typeface="TH Sarabun New"/>
+              </a:rPr>
+              <a:t>7, 2</a:t>
+            </a:r>
+          </a:p>
+        </p:txBody>
+      </p:sp>
+      <p:sp>
+        <p:nvSpPr>
+          <p:cNvPr id="46" name="Rectangle 45"/>
+          <p:cNvSpPr/>
+          <p:nvPr/>
+        </p:nvSpPr>
+        <p:spPr>
+          <a:xfrm>
+            <a:off x="548640" y="5074920"/>
+            <a:ext cx="594360" cy="484632"/>
+          </a:xfrm>
+          <a:prstGeom prst="rect">
+            <a:avLst/>
+          </a:prstGeom>
+          <a:solidFill>
+            <a:srgbClr val="F9FBFD"/>
+          </a:solidFill>
+          <a:ln w="10160">
+            <a:solidFill>
+              <a:srgbClr val="C9D5E5"/>
+            </a:solidFill>
+          </a:ln>
+        </p:spPr>
+        <p:style>
+          <a:lnRef idx="1">
+            <a:schemeClr val="accent1"/>
+          </a:lnRef>
+          <a:fillRef idx="3">
+            <a:schemeClr val="accent1"/>
+          </a:fillRef>
+          <a:effectRef idx="2">
+            <a:schemeClr val="accent1"/>
+          </a:effectRef>
+          <a:fontRef idx="minor">
+            <a:schemeClr val="lt1"/>
+          </a:fontRef>
+        </p:style>
+        <p:txBody>
+          <a:bodyPr rtlCol="0" anchor="ctr" lIns="73152" rIns="73152" tIns="73152" bIns="73152"/>
+          <a:lstStyle/>
+          <a:p>
+            <a:pPr algn="ctr"/>
+            <a:r>
+              <a:rPr sz="1230" b="0">
+                <a:solidFill>
+                  <a:srgbClr val="000000"/>
+                </a:solidFill>
+                <a:latin typeface="TH Sarabun New"/>
+              </a:rPr>
+              <a:t>8</a:t>
+            </a:r>
+          </a:p>
+        </p:txBody>
+      </p:sp>
+      <p:sp>
+        <p:nvSpPr>
+          <p:cNvPr id="47" name="Rectangle 46"/>
+          <p:cNvSpPr/>
+          <p:nvPr/>
+        </p:nvSpPr>
+        <p:spPr>
+          <a:xfrm>
+            <a:off x="1143000" y="5074920"/>
+            <a:ext cx="1325880" cy="484632"/>
+          </a:xfrm>
+          <a:prstGeom prst="rect">
+            <a:avLst/>
+          </a:prstGeom>
+          <a:solidFill>
+            <a:srgbClr val="F9FBFD"/>
+          </a:solidFill>
+          <a:ln w="10160">
+            <a:solidFill>
+              <a:srgbClr val="C9D5E5"/>
+            </a:solidFill>
+          </a:ln>
+        </p:spPr>
+        <p:style>
+          <a:lnRef idx="1">
+            <a:schemeClr val="accent1"/>
+          </a:lnRef>
+          <a:fillRef idx="3">
+            <a:schemeClr val="accent1"/>
+          </a:fillRef>
+          <a:effectRef idx="2">
+            <a:schemeClr val="accent1"/>
+          </a:effectRef>
+          <a:fontRef idx="minor">
+            <a:schemeClr val="lt1"/>
+          </a:fontRef>
+        </p:style>
+        <p:txBody>
+          <a:bodyPr rtlCol="0" anchor="ctr" lIns="73152" rIns="73152" tIns="73152" bIns="73152"/>
+          <a:lstStyle/>
+          <a:p>
+            <a:pPr algn="ctr"/>
+            <a:r>
+              <a:rPr sz="1230" b="0">
+                <a:solidFill>
+                  <a:srgbClr val="000000"/>
+                </a:solidFill>
+                <a:latin typeface="TH Sarabun New"/>
+              </a:rPr>
+              <a:t>END</a:t>
+            </a:r>
+          </a:p>
+        </p:txBody>
+      </p:sp>
+      <p:sp>
+        <p:nvSpPr>
+          <p:cNvPr id="48" name="Rectangle 47"/>
+          <p:cNvSpPr/>
+          <p:nvPr/>
+        </p:nvSpPr>
+        <p:spPr>
+          <a:xfrm>
+            <a:off x="2468880" y="5074920"/>
+            <a:ext cx="3657600" cy="484632"/>
+          </a:xfrm>
+          <a:prstGeom prst="rect">
+            <a:avLst/>
+          </a:prstGeom>
+          <a:solidFill>
+            <a:srgbClr val="F9FBFD"/>
+          </a:solidFill>
+          <a:ln w="10160">
+            <a:solidFill>
+              <a:srgbClr val="C9D5E5"/>
+            </a:solidFill>
+          </a:ln>
+        </p:spPr>
+        <p:style>
+          <a:lnRef idx="1">
+            <a:schemeClr val="accent1"/>
+          </a:lnRef>
+          <a:fillRef idx="3">
+            <a:schemeClr val="accent1"/>
+          </a:fillRef>
+          <a:effectRef idx="2">
+            <a:schemeClr val="accent1"/>
+          </a:effectRef>
+          <a:fontRef idx="minor">
+            <a:schemeClr val="lt1"/>
+          </a:fontRef>
+        </p:style>
+        <p:txBody>
+          <a:bodyPr rtlCol="0" anchor="ctr" lIns="73152" rIns="73152" tIns="73152" bIns="73152"/>
+          <a:lstStyle/>
+          <a:p>
+            <a:pPr algn="ctr"/>
+            <a:r>
+              <a:rPr sz="1230" b="0">
+                <a:solidFill>
+                  <a:srgbClr val="000000"/>
+                </a:solidFill>
+                <a:latin typeface="TH Sarabun New"/>
+              </a:rPr>
+              <a:t>pop * → 7*2=14</a:t>
+            </a:r>
+          </a:p>
+        </p:txBody>
+      </p:sp>
+      <p:sp>
+        <p:nvSpPr>
+          <p:cNvPr id="49" name="Rectangle 48"/>
+          <p:cNvSpPr/>
+          <p:nvPr/>
+        </p:nvSpPr>
+        <p:spPr>
+          <a:xfrm>
+            <a:off x="6126480" y="5074920"/>
+            <a:ext cx="2788920" cy="484632"/>
+          </a:xfrm>
+          <a:prstGeom prst="rect">
+            <a:avLst/>
+          </a:prstGeom>
+          <a:solidFill>
+            <a:srgbClr val="F9FBFD"/>
+          </a:solidFill>
+          <a:ln w="10160">
+            <a:solidFill>
+              <a:srgbClr val="C9D5E5"/>
+            </a:solidFill>
+          </a:ln>
+        </p:spPr>
+        <p:style>
+          <a:lnRef idx="1">
+            <a:schemeClr val="accent1"/>
+          </a:lnRef>
+          <a:fillRef idx="3">
+            <a:schemeClr val="accent1"/>
+          </a:fillRef>
+          <a:effectRef idx="2">
+            <a:schemeClr val="accent1"/>
+          </a:effectRef>
+          <a:fontRef idx="minor">
+            <a:schemeClr val="lt1"/>
+          </a:fontRef>
+        </p:style>
+        <p:txBody>
+          <a:bodyPr rtlCol="0" anchor="ctr" lIns="73152" rIns="73152" tIns="73152" bIns="73152"/>
+          <a:lstStyle/>
+          <a:p>
+            <a:pPr algn="ctr"/>
+            <a:r>
+              <a:rPr sz="1230" b="0">
+                <a:solidFill>
+                  <a:srgbClr val="000000"/>
+                </a:solidFill>
+                <a:latin typeface="TH Sarabun New"/>
+              </a:rPr>
+              <a:t>∅</a:t>
+            </a:r>
+          </a:p>
+        </p:txBody>
+      </p:sp>
+      <p:sp>
+        <p:nvSpPr>
+          <p:cNvPr id="50" name="Rectangle 49"/>
+          <p:cNvSpPr/>
+          <p:nvPr/>
+        </p:nvSpPr>
+        <p:spPr>
+          <a:xfrm>
+            <a:off x="8915400" y="5074920"/>
+            <a:ext cx="3566160" cy="484632"/>
+          </a:xfrm>
+          <a:prstGeom prst="rect">
+            <a:avLst/>
+          </a:prstGeom>
+          <a:solidFill>
+            <a:srgbClr val="F9FBFD"/>
+          </a:solidFill>
+          <a:ln w="10160">
+            <a:solidFill>
+              <a:srgbClr val="C9D5E5"/>
+            </a:solidFill>
+          </a:ln>
+        </p:spPr>
+        <p:style>
+          <a:lnRef idx="1">
+            <a:schemeClr val="accent1"/>
+          </a:lnRef>
+          <a:fillRef idx="3">
+            <a:schemeClr val="accent1"/>
+          </a:fillRef>
+          <a:effectRef idx="2">
+            <a:schemeClr val="accent1"/>
+          </a:effectRef>
+          <a:fontRef idx="minor">
+            <a:schemeClr val="lt1"/>
+          </a:fontRef>
+        </p:style>
+        <p:txBody>
+          <a:bodyPr rtlCol="0" anchor="ctr" lIns="73152" rIns="73152" tIns="73152" bIns="73152"/>
+          <a:lstStyle/>
+          <a:p>
+            <a:pPr algn="ctr"/>
+            <a:r>
+              <a:rPr sz="1230" b="0">
+                <a:solidFill>
+                  <a:srgbClr val="000000"/>
+                </a:solidFill>
+                <a:latin typeface="TH Sarabun New"/>
+              </a:rPr>
+              <a:t>14</a:t>
+            </a:r>
+          </a:p>
+        </p:txBody>
+      </p:sp>
+      <p:sp>
+        <p:nvSpPr>
+          <p:cNvPr id="51" name="Rectangle 50"/>
+          <p:cNvSpPr/>
+          <p:nvPr/>
+        </p:nvSpPr>
+        <p:spPr>
+          <a:xfrm>
+            <a:off x="566928" y="5650992"/>
+            <a:ext cx="3383280" cy="603504"/>
+          </a:xfrm>
+          <a:prstGeom prst="rect">
+            <a:avLst/>
+          </a:prstGeom>
+          <a:solidFill>
+            <a:srgbClr val="E6F5F0"/>
+          </a:solidFill>
+          <a:ln w="10160">
+            <a:solidFill>
+              <a:srgbClr val="C9D5E5"/>
+            </a:solidFill>
+          </a:ln>
+        </p:spPr>
+        <p:style>
+          <a:lnRef idx="1">
+            <a:schemeClr val="accent1"/>
+          </a:lnRef>
+          <a:fillRef idx="3">
+            <a:schemeClr val="accent1"/>
+          </a:fillRef>
+          <a:effectRef idx="2">
+            <a:schemeClr val="accent1"/>
+          </a:effectRef>
+          <a:fontRef idx="minor">
+            <a:schemeClr val="lt1"/>
+          </a:fontRef>
+        </p:style>
+        <p:txBody>
+          <a:bodyPr rtlCol="0" anchor="ctr" lIns="73152" rIns="73152" tIns="73152" bIns="73152"/>
+          <a:lstStyle/>
+          <a:p>
+            <a:pPr algn="ctr"/>
+            <a:r>
+              <a:rPr sz="1400" b="1">
+                <a:solidFill>
+                  <a:srgbClr val="000000"/>
+                </a:solidFill>
+                <a:latin typeface="TH Sarabun New"/>
+              </a:rPr>
+              <a:t>Operator Stack
+จัดลำดับ + และ *</a:t>
+            </a:r>
+          </a:p>
+        </p:txBody>
+      </p:sp>
+      <p:sp>
+        <p:nvSpPr>
+          <p:cNvPr id="52" name="Rectangle 51"/>
+          <p:cNvSpPr/>
+          <p:nvPr/>
+        </p:nvSpPr>
+        <p:spPr>
+          <a:xfrm>
+            <a:off x="4023360" y="5650992"/>
+            <a:ext cx="3383280" cy="603504"/>
+          </a:xfrm>
+          <a:prstGeom prst="rect">
+            <a:avLst/>
+          </a:prstGeom>
+          <a:solidFill>
+            <a:srgbClr val="EAF0F8"/>
+          </a:solidFill>
+          <a:ln w="10160">
+            <a:solidFill>
+              <a:srgbClr val="C9D5E5"/>
+            </a:solidFill>
+          </a:ln>
+        </p:spPr>
+        <p:style>
+          <a:lnRef idx="1">
+            <a:schemeClr val="accent1"/>
+          </a:lnRef>
+          <a:fillRef idx="3">
+            <a:schemeClr val="accent1"/>
+          </a:fillRef>
+          <a:effectRef idx="2">
+            <a:schemeClr val="accent1"/>
+          </a:effectRef>
+          <a:fontRef idx="minor">
+            <a:schemeClr val="lt1"/>
+          </a:fontRef>
+        </p:style>
+        <p:txBody>
+          <a:bodyPr rtlCol="0" anchor="ctr" lIns="73152" rIns="73152" tIns="73152" bIns="73152"/>
+          <a:lstStyle/>
+          <a:p>
+            <a:pPr algn="ctr"/>
+            <a:r>
+              <a:rPr sz="1400" b="1">
+                <a:solidFill>
+                  <a:srgbClr val="000000"/>
+                </a:solidFill>
+                <a:latin typeface="TH Sarabun New"/>
+              </a:rPr>
+              <a:t>Operand Stack
+เก็บ 3, 4 → 7 → 7, 2 → 14</a:t>
+            </a:r>
+          </a:p>
+        </p:txBody>
+      </p:sp>
+      <p:sp>
+        <p:nvSpPr>
+          <p:cNvPr id="53" name="Rectangle 52"/>
+          <p:cNvSpPr/>
+          <p:nvPr/>
+        </p:nvSpPr>
+        <p:spPr>
+          <a:xfrm>
+            <a:off x="7479792" y="5650992"/>
+            <a:ext cx="4078224" cy="603504"/>
+          </a:xfrm>
+          <a:prstGeom prst="rect">
+            <a:avLst/>
+          </a:prstGeom>
+          <a:solidFill>
+            <a:srgbClr val="FFF1DE"/>
+          </a:solidFill>
+          <a:ln w="10160">
+            <a:solidFill>
+              <a:srgbClr val="C9D5E5"/>
+            </a:solidFill>
+          </a:ln>
+        </p:spPr>
+        <p:style>
+          <a:lnRef idx="1">
+            <a:schemeClr val="accent1"/>
+          </a:lnRef>
+          <a:fillRef idx="3">
+            <a:schemeClr val="accent1"/>
+          </a:fillRef>
+          <a:effectRef idx="2">
+            <a:schemeClr val="accent1"/>
+          </a:effectRef>
+          <a:fontRef idx="minor">
+            <a:schemeClr val="lt1"/>
+          </a:fontRef>
+        </p:style>
+        <p:txBody>
+          <a:bodyPr rtlCol="0" anchor="ctr" lIns="73152" rIns="73152" tIns="73152" bIns="73152"/>
+          <a:lstStyle/>
+          <a:p>
+            <a:pPr algn="ctr"/>
+            <a:r>
+              <a:rPr sz="1400" b="1">
+                <a:solidFill>
+                  <a:srgbClr val="000000"/>
+                </a:solidFill>
+                <a:latin typeface="TH Sarabun New"/>
+              </a:rPr>
+              <a:t>Result = 14
+คำนวณตรงจาก Infix โดยไม่สร้าง Postfix</a:t>
+            </a:r>
+          </a:p>
+        </p:txBody>
+      </p:sp>
+      <p:sp>
+        <p:nvSpPr>
+          <p:cNvPr id="54" name="TextBox 53"/>
+          <p:cNvSpPr txBox="1"/>
+          <p:nvPr/>
+        </p:nvSpPr>
+        <p:spPr>
+          <a:xfrm>
+            <a:off x="11475720" y="6510528"/>
+            <a:ext cx="795528" cy="301752"/>
+          </a:xfrm>
+          <a:prstGeom prst="rect">
+            <a:avLst/>
+          </a:prstGeom>
+          <a:noFill/>
+          <a:ln>
+            <a:noFill/>
+          </a:ln>
+        </p:spPr>
+        <p:txBody>
+          <a:bodyPr wrap="none" lIns="73152" rIns="73152" tIns="73152" bIns="73152" anchor="ctr">
+            <a:spAutoFit/>
+          </a:bodyPr>
+          <a:lstStyle/>
+          <a:p>
+            <a:pPr algn="ctr"/>
+            <a:r>
+              <a:rPr sz="1200" b="0">
+                <a:solidFill>
+                  <a:srgbClr val="000000"/>
+                </a:solidFill>
+                <a:latin typeface="TH Sarabun New"/>
+              </a:rPr>
+              <a:t>7</a:t>
+            </a:r>
+          </a:p>
+        </p:txBody>
+      </p:sp>
+    </p:spTree>
+  </p:cSld>
+  <p:clrMapOvr>
+    <a:masterClrMapping/>
+  </p:clrMapOvr>
+</p:sld>
+</file>
+
 <file path=ppt/slides/slide2.xml><?xml version="1.0" encoding="utf-8"?>
 <p:sld xmlns:a="http://schemas.openxmlformats.org/drawingml/2006/main" xmlns:p="http://schemas.openxmlformats.org/presentationml/2006/main" xmlns:r="http://schemas.openxmlformats.org/officeDocument/2006/relationships" xmlns:p14="http://schemas.microsoft.com/office/powerpoint/2010/main" xmlns:p15="http://schemas.microsoft.com/office/powerpoint/2012/main" xmlns:mc="http://schemas.openxmlformats.org/markup-compatibility/2006">
   <p:cSld>
@@ -29454,35 +32172,13 @@
             </a:lvl1pPr>
           </a:lstStyle>
           <a:p>
-            <a:pPr indent="0" algn="l" defTabSz="914400">
-              <a:lnSpc>
-                <a:spcPct val="100000"/>
-              </a:lnSpc>
-              <a:buNone/>
-              <a:tabLst>
-                <a:tab pos="0" algn="l"/>
-              </a:tabLst>
-            </a:pPr>
-            <a:fld id="{C339E4BD-44A3-4A72-8682-FE65265F00F2}" type="slidenum">
-              <a:rPr lang="en-US" sz="1200" b="0" u="none" strike="noStrike">
-                <a:solidFill>
-                  <a:srgbClr val="667085"/>
-                </a:solidFill>
-                <a:effectLst/>
-                <a:uFillTx/>
-                <a:latin typeface="TH Sarabun New"/>
-                <a:ea typeface="TH Sarabun New"/>
-              </a:rPr>
-              <a:t>7</a:t>
-            </a:fld>
-            <a:endParaRPr lang="en-US" sz="1200" b="0" u="none" strike="noStrike">
-              <a:solidFill>
-                <a:srgbClr val="000000"/>
-              </a:solidFill>
-              <a:effectLst/>
-              <a:uFillTx/>
-              <a:latin typeface="Times New Roman"/>
-            </a:endParaRPr>
+            <a:pPr algn="ctr"/>
+            <a:r>
+              <a:rPr sz="1200" b="0">
+                <a:latin typeface="TH Sarabun New"/>
+              </a:rPr>
+              <a:t>8</a:t>
+            </a:r>
           </a:p>
         </p:txBody>
       </p:sp>
@@ -32664,35 +35360,13 @@
             </a:lvl1pPr>
           </a:lstStyle>
           <a:p>
-            <a:pPr indent="0" algn="l" defTabSz="914400">
-              <a:lnSpc>
-                <a:spcPct val="100000"/>
-              </a:lnSpc>
-              <a:buNone/>
-              <a:tabLst>
-                <a:tab pos="0" algn="l"/>
-              </a:tabLst>
-            </a:pPr>
-            <a:fld id="{BB0F92DD-C338-4F00-B922-3A66ED839364}" type="slidenum">
-              <a:rPr lang="en-US" sz="1200" b="0" u="none" strike="noStrike">
-                <a:solidFill>
-                  <a:srgbClr val="667085"/>
-                </a:solidFill>
-                <a:effectLst/>
-                <a:uFillTx/>
-                <a:latin typeface="TH Sarabun New"/>
-                <a:ea typeface="TH Sarabun New"/>
-              </a:rPr>
-              <a:t>8</a:t>
-            </a:fld>
-            <a:endParaRPr lang="en-US" sz="1200" b="0" u="none" strike="noStrike">
-              <a:solidFill>
-                <a:srgbClr val="000000"/>
-              </a:solidFill>
-              <a:effectLst/>
-              <a:uFillTx/>
-              <a:latin typeface="Times New Roman"/>
-            </a:endParaRPr>
+            <a:pPr algn="ctr"/>
+            <a:r>
+              <a:rPr sz="1200" b="0">
+                <a:latin typeface="TH Sarabun New"/>
+              </a:rPr>
+              <a:t>9</a:t>
+            </a:r>
           </a:p>
         </p:txBody>
       </p:sp>
@@ -34656,35 +37330,13 @@
             </a:lvl1pPr>
           </a:lstStyle>
           <a:p>
-            <a:pPr indent="0" algn="l" defTabSz="914400">
-              <a:lnSpc>
-                <a:spcPct val="100000"/>
-              </a:lnSpc>
-              <a:buNone/>
-              <a:tabLst>
-                <a:tab pos="0" algn="l"/>
-              </a:tabLst>
-            </a:pPr>
-            <a:fld id="{2555E800-E44A-4D8E-BD1F-3C9C6D68D168}" type="slidenum">
-              <a:rPr lang="en-US" sz="1200" b="0" u="none" strike="noStrike">
-                <a:solidFill>
-                  <a:srgbClr val="667085"/>
-                </a:solidFill>
-                <a:effectLst/>
-                <a:uFillTx/>
-                <a:latin typeface="TH Sarabun New"/>
-                <a:ea typeface="TH Sarabun New"/>
-              </a:rPr>
-              <a:t>9</a:t>
-            </a:fld>
-            <a:endParaRPr lang="en-US" sz="1200" b="0" u="none" strike="noStrike">
-              <a:solidFill>
-                <a:srgbClr val="000000"/>
-              </a:solidFill>
-              <a:effectLst/>
-              <a:uFillTx/>
-              <a:latin typeface="Times New Roman"/>
-            </a:endParaRPr>
+            <a:pPr algn="ctr"/>
+            <a:r>
+              <a:rPr sz="1200" b="0">
+                <a:latin typeface="TH Sarabun New"/>
+              </a:rPr>
+              <a:t>10</a:t>
+            </a:r>
           </a:p>
         </p:txBody>
       </p:sp>
